--- a/萬國得知你的救恩(崇拜版).pptx
+++ b/萬國得知你的救恩(崇拜版).pptx
@@ -5,10 +5,15 @@
     <p:sldMasterId id="2147483660" r:id="rId1"/>
   </p:sldMasterIdLst>
   <p:sldIdLst>
-    <p:sldId id="256" r:id="rId2"/>
-    <p:sldId id="257" r:id="rId3"/>
-    <p:sldId id="258" r:id="rId4"/>
-    <p:sldId id="259" r:id="rId5"/>
+    <p:sldId id="353" r:id="rId2"/>
+    <p:sldId id="390" r:id="rId3"/>
+    <p:sldId id="391" r:id="rId4"/>
+    <p:sldId id="392" r:id="rId5"/>
+    <p:sldId id="393" r:id="rId6"/>
+    <p:sldId id="394" r:id="rId7"/>
+    <p:sldId id="395" r:id="rId8"/>
+    <p:sldId id="396" r:id="rId9"/>
+    <p:sldId id="397" r:id="rId10"/>
   </p:sldIdLst>
   <p:sldSz cx="9144000" cy="5143500" type="screen16x9"/>
   <p:notesSz cx="6858000" cy="9144000"/>
@@ -164,10 +169,9 @@
           <a:lstStyle/>
           <a:p>
             <a:r>
-              <a:rPr lang="zh-TW" altLang="en-US" smtClean="0"/>
+              <a:rPr lang="zh-TW" altLang="en-US"/>
               <a:t>按一下以編輯母片標題樣式</a:t>
             </a:r>
-            <a:endParaRPr lang="zh-TW" altLang="en-US"/>
           </a:p>
         </p:txBody>
       </p:sp>
@@ -283,10 +287,9 @@
           </a:lstStyle>
           <a:p>
             <a:r>
-              <a:rPr lang="zh-TW" altLang="en-US" smtClean="0"/>
+              <a:rPr lang="zh-TW" altLang="en-US"/>
               <a:t>按一下以編輯母片副標題樣式</a:t>
             </a:r>
-            <a:endParaRPr lang="zh-TW" altLang="en-US"/>
           </a:p>
         </p:txBody>
       </p:sp>
@@ -307,7 +310,7 @@
           <a:p>
             <a:fld id="{8117E584-0345-455E-92E5-C83A03908D5D}" type="datetimeFigureOut">
               <a:rPr lang="zh-TW" altLang="en-US" smtClean="0"/>
-              <a:t>2020/7/18</a:t>
+              <a:t>2025/1/26</a:t>
             </a:fld>
             <a:endParaRPr lang="zh-TW" altLang="en-US"/>
           </a:p>
@@ -396,10 +399,9 @@
           <a:lstStyle/>
           <a:p>
             <a:r>
-              <a:rPr lang="zh-TW" altLang="en-US" smtClean="0"/>
+              <a:rPr lang="zh-TW" altLang="en-US"/>
               <a:t>按一下以編輯母片標題樣式</a:t>
             </a:r>
-            <a:endParaRPr lang="zh-TW" altLang="en-US"/>
           </a:p>
         </p:txBody>
       </p:sp>
@@ -420,38 +422,37 @@
           <a:p>
             <a:pPr lvl="0"/>
             <a:r>
-              <a:rPr lang="zh-TW" altLang="en-US" smtClean="0"/>
+              <a:rPr lang="zh-TW" altLang="en-US"/>
               <a:t>按一下以編輯母片文字樣式</a:t>
             </a:r>
           </a:p>
           <a:p>
             <a:pPr lvl="1"/>
             <a:r>
-              <a:rPr lang="zh-TW" altLang="en-US" smtClean="0"/>
+              <a:rPr lang="zh-TW" altLang="en-US"/>
               <a:t>第二層</a:t>
             </a:r>
           </a:p>
           <a:p>
             <a:pPr lvl="2"/>
             <a:r>
-              <a:rPr lang="zh-TW" altLang="en-US" smtClean="0"/>
+              <a:rPr lang="zh-TW" altLang="en-US"/>
               <a:t>第三層</a:t>
             </a:r>
           </a:p>
           <a:p>
             <a:pPr lvl="3"/>
             <a:r>
-              <a:rPr lang="zh-TW" altLang="en-US" smtClean="0"/>
+              <a:rPr lang="zh-TW" altLang="en-US"/>
               <a:t>第四層</a:t>
             </a:r>
           </a:p>
           <a:p>
             <a:pPr lvl="4"/>
             <a:r>
-              <a:rPr lang="zh-TW" altLang="en-US" smtClean="0"/>
+              <a:rPr lang="zh-TW" altLang="en-US"/>
               <a:t>第五層</a:t>
             </a:r>
-            <a:endParaRPr lang="zh-TW" altLang="en-US"/>
           </a:p>
         </p:txBody>
       </p:sp>
@@ -472,7 +473,7 @@
           <a:p>
             <a:fld id="{8117E584-0345-455E-92E5-C83A03908D5D}" type="datetimeFigureOut">
               <a:rPr lang="zh-TW" altLang="en-US" smtClean="0"/>
-              <a:t>2020/7/18</a:t>
+              <a:t>2025/1/26</a:t>
             </a:fld>
             <a:endParaRPr lang="zh-TW" altLang="en-US"/>
           </a:p>
@@ -566,10 +567,9 @@
           <a:lstStyle/>
           <a:p>
             <a:r>
-              <a:rPr lang="zh-TW" altLang="en-US" smtClean="0"/>
+              <a:rPr lang="zh-TW" altLang="en-US"/>
               <a:t>按一下以編輯母片標題樣式</a:t>
             </a:r>
-            <a:endParaRPr lang="zh-TW" altLang="en-US"/>
           </a:p>
         </p:txBody>
       </p:sp>
@@ -595,38 +595,37 @@
           <a:p>
             <a:pPr lvl="0"/>
             <a:r>
-              <a:rPr lang="zh-TW" altLang="en-US" smtClean="0"/>
+              <a:rPr lang="zh-TW" altLang="en-US"/>
               <a:t>按一下以編輯母片文字樣式</a:t>
             </a:r>
           </a:p>
           <a:p>
             <a:pPr lvl="1"/>
             <a:r>
-              <a:rPr lang="zh-TW" altLang="en-US" smtClean="0"/>
+              <a:rPr lang="zh-TW" altLang="en-US"/>
               <a:t>第二層</a:t>
             </a:r>
           </a:p>
           <a:p>
             <a:pPr lvl="2"/>
             <a:r>
-              <a:rPr lang="zh-TW" altLang="en-US" smtClean="0"/>
+              <a:rPr lang="zh-TW" altLang="en-US"/>
               <a:t>第三層</a:t>
             </a:r>
           </a:p>
           <a:p>
             <a:pPr lvl="3"/>
             <a:r>
-              <a:rPr lang="zh-TW" altLang="en-US" smtClean="0"/>
+              <a:rPr lang="zh-TW" altLang="en-US"/>
               <a:t>第四層</a:t>
             </a:r>
           </a:p>
           <a:p>
             <a:pPr lvl="4"/>
             <a:r>
-              <a:rPr lang="zh-TW" altLang="en-US" smtClean="0"/>
+              <a:rPr lang="zh-TW" altLang="en-US"/>
               <a:t>第五層</a:t>
             </a:r>
-            <a:endParaRPr lang="zh-TW" altLang="en-US"/>
           </a:p>
         </p:txBody>
       </p:sp>
@@ -647,7 +646,7 @@
           <a:p>
             <a:fld id="{8117E584-0345-455E-92E5-C83A03908D5D}" type="datetimeFigureOut">
               <a:rPr lang="zh-TW" altLang="en-US" smtClean="0"/>
-              <a:t>2020/7/18</a:t>
+              <a:t>2025/1/26</a:t>
             </a:fld>
             <a:endParaRPr lang="zh-TW" altLang="en-US"/>
           </a:p>
@@ -736,10 +735,9 @@
           <a:lstStyle/>
           <a:p>
             <a:r>
-              <a:rPr lang="zh-TW" altLang="en-US" smtClean="0"/>
+              <a:rPr lang="zh-TW" altLang="en-US"/>
               <a:t>按一下以編輯母片標題樣式</a:t>
             </a:r>
-            <a:endParaRPr lang="zh-TW" altLang="en-US"/>
           </a:p>
         </p:txBody>
       </p:sp>
@@ -760,38 +758,37 @@
           <a:p>
             <a:pPr lvl="0"/>
             <a:r>
-              <a:rPr lang="zh-TW" altLang="en-US" smtClean="0"/>
+              <a:rPr lang="zh-TW" altLang="en-US"/>
               <a:t>按一下以編輯母片文字樣式</a:t>
             </a:r>
           </a:p>
           <a:p>
             <a:pPr lvl="1"/>
             <a:r>
-              <a:rPr lang="zh-TW" altLang="en-US" smtClean="0"/>
+              <a:rPr lang="zh-TW" altLang="en-US"/>
               <a:t>第二層</a:t>
             </a:r>
           </a:p>
           <a:p>
             <a:pPr lvl="2"/>
             <a:r>
-              <a:rPr lang="zh-TW" altLang="en-US" smtClean="0"/>
+              <a:rPr lang="zh-TW" altLang="en-US"/>
               <a:t>第三層</a:t>
             </a:r>
           </a:p>
           <a:p>
             <a:pPr lvl="3"/>
             <a:r>
-              <a:rPr lang="zh-TW" altLang="en-US" smtClean="0"/>
+              <a:rPr lang="zh-TW" altLang="en-US"/>
               <a:t>第四層</a:t>
             </a:r>
           </a:p>
           <a:p>
             <a:pPr lvl="4"/>
             <a:r>
-              <a:rPr lang="zh-TW" altLang="en-US" smtClean="0"/>
+              <a:rPr lang="zh-TW" altLang="en-US"/>
               <a:t>第五層</a:t>
             </a:r>
-            <a:endParaRPr lang="zh-TW" altLang="en-US"/>
           </a:p>
         </p:txBody>
       </p:sp>
@@ -812,7 +809,7 @@
           <a:p>
             <a:fld id="{8117E584-0345-455E-92E5-C83A03908D5D}" type="datetimeFigureOut">
               <a:rPr lang="zh-TW" altLang="en-US" smtClean="0"/>
-              <a:t>2020/7/18</a:t>
+              <a:t>2025/1/26</a:t>
             </a:fld>
             <a:endParaRPr lang="zh-TW" altLang="en-US"/>
           </a:p>
@@ -910,10 +907,9 @@
           </a:lstStyle>
           <a:p>
             <a:r>
-              <a:rPr lang="zh-TW" altLang="en-US" smtClean="0"/>
+              <a:rPr lang="zh-TW" altLang="en-US"/>
               <a:t>按一下以編輯母片標題樣式</a:t>
             </a:r>
-            <a:endParaRPr lang="zh-TW" altLang="en-US"/>
           </a:p>
         </p:txBody>
       </p:sp>
@@ -1030,7 +1026,7 @@
           <a:p>
             <a:pPr lvl="0"/>
             <a:r>
-              <a:rPr lang="zh-TW" altLang="en-US" smtClean="0"/>
+              <a:rPr lang="zh-TW" altLang="en-US"/>
               <a:t>按一下以編輯母片文字樣式</a:t>
             </a:r>
           </a:p>
@@ -1053,7 +1049,7 @@
           <a:p>
             <a:fld id="{8117E584-0345-455E-92E5-C83A03908D5D}" type="datetimeFigureOut">
               <a:rPr lang="zh-TW" altLang="en-US" smtClean="0"/>
-              <a:t>2020/7/18</a:t>
+              <a:t>2025/1/26</a:t>
             </a:fld>
             <a:endParaRPr lang="zh-TW" altLang="en-US"/>
           </a:p>
@@ -1142,10 +1138,9 @@
           <a:lstStyle/>
           <a:p>
             <a:r>
-              <a:rPr lang="zh-TW" altLang="en-US" smtClean="0"/>
+              <a:rPr lang="zh-TW" altLang="en-US"/>
               <a:t>按一下以編輯母片標題樣式</a:t>
             </a:r>
-            <a:endParaRPr lang="zh-TW" altLang="en-US"/>
           </a:p>
         </p:txBody>
       </p:sp>
@@ -1199,38 +1194,37 @@
           <a:p>
             <a:pPr lvl="0"/>
             <a:r>
-              <a:rPr lang="zh-TW" altLang="en-US" smtClean="0"/>
+              <a:rPr lang="zh-TW" altLang="en-US"/>
               <a:t>按一下以編輯母片文字樣式</a:t>
             </a:r>
           </a:p>
           <a:p>
             <a:pPr lvl="1"/>
             <a:r>
-              <a:rPr lang="zh-TW" altLang="en-US" smtClean="0"/>
+              <a:rPr lang="zh-TW" altLang="en-US"/>
               <a:t>第二層</a:t>
             </a:r>
           </a:p>
           <a:p>
             <a:pPr lvl="2"/>
             <a:r>
-              <a:rPr lang="zh-TW" altLang="en-US" smtClean="0"/>
+              <a:rPr lang="zh-TW" altLang="en-US"/>
               <a:t>第三層</a:t>
             </a:r>
           </a:p>
           <a:p>
             <a:pPr lvl="3"/>
             <a:r>
-              <a:rPr lang="zh-TW" altLang="en-US" smtClean="0"/>
+              <a:rPr lang="zh-TW" altLang="en-US"/>
               <a:t>第四層</a:t>
             </a:r>
           </a:p>
           <a:p>
             <a:pPr lvl="4"/>
             <a:r>
-              <a:rPr lang="zh-TW" altLang="en-US" smtClean="0"/>
+              <a:rPr lang="zh-TW" altLang="en-US"/>
               <a:t>第五層</a:t>
             </a:r>
-            <a:endParaRPr lang="zh-TW" altLang="en-US"/>
           </a:p>
         </p:txBody>
       </p:sp>
@@ -1284,38 +1278,37 @@
           <a:p>
             <a:pPr lvl="0"/>
             <a:r>
-              <a:rPr lang="zh-TW" altLang="en-US" smtClean="0"/>
+              <a:rPr lang="zh-TW" altLang="en-US"/>
               <a:t>按一下以編輯母片文字樣式</a:t>
             </a:r>
           </a:p>
           <a:p>
             <a:pPr lvl="1"/>
             <a:r>
-              <a:rPr lang="zh-TW" altLang="en-US" smtClean="0"/>
+              <a:rPr lang="zh-TW" altLang="en-US"/>
               <a:t>第二層</a:t>
             </a:r>
           </a:p>
           <a:p>
             <a:pPr lvl="2"/>
             <a:r>
-              <a:rPr lang="zh-TW" altLang="en-US" smtClean="0"/>
+              <a:rPr lang="zh-TW" altLang="en-US"/>
               <a:t>第三層</a:t>
             </a:r>
           </a:p>
           <a:p>
             <a:pPr lvl="3"/>
             <a:r>
-              <a:rPr lang="zh-TW" altLang="en-US" smtClean="0"/>
+              <a:rPr lang="zh-TW" altLang="en-US"/>
               <a:t>第四層</a:t>
             </a:r>
           </a:p>
           <a:p>
             <a:pPr lvl="4"/>
             <a:r>
-              <a:rPr lang="zh-TW" altLang="en-US" smtClean="0"/>
+              <a:rPr lang="zh-TW" altLang="en-US"/>
               <a:t>第五層</a:t>
             </a:r>
-            <a:endParaRPr lang="zh-TW" altLang="en-US"/>
           </a:p>
         </p:txBody>
       </p:sp>
@@ -1336,7 +1329,7 @@
           <a:p>
             <a:fld id="{8117E584-0345-455E-92E5-C83A03908D5D}" type="datetimeFigureOut">
               <a:rPr lang="zh-TW" altLang="en-US" smtClean="0"/>
-              <a:t>2020/7/18</a:t>
+              <a:t>2025/1/26</a:t>
             </a:fld>
             <a:endParaRPr lang="zh-TW" altLang="en-US"/>
           </a:p>
@@ -1429,10 +1422,9 @@
           </a:lstStyle>
           <a:p>
             <a:r>
-              <a:rPr lang="zh-TW" altLang="en-US" smtClean="0"/>
+              <a:rPr lang="zh-TW" altLang="en-US"/>
               <a:t>按一下以編輯母片標題樣式</a:t>
             </a:r>
-            <a:endParaRPr lang="zh-TW" altLang="en-US"/>
           </a:p>
         </p:txBody>
       </p:sp>
@@ -1495,7 +1487,7 @@
           <a:p>
             <a:pPr lvl="0"/>
             <a:r>
-              <a:rPr lang="zh-TW" altLang="en-US" smtClean="0"/>
+              <a:rPr lang="zh-TW" altLang="en-US"/>
               <a:t>按一下以編輯母片文字樣式</a:t>
             </a:r>
           </a:p>
@@ -1551,38 +1543,37 @@
           <a:p>
             <a:pPr lvl="0"/>
             <a:r>
-              <a:rPr lang="zh-TW" altLang="en-US" smtClean="0"/>
+              <a:rPr lang="zh-TW" altLang="en-US"/>
               <a:t>按一下以編輯母片文字樣式</a:t>
             </a:r>
           </a:p>
           <a:p>
             <a:pPr lvl="1"/>
             <a:r>
-              <a:rPr lang="zh-TW" altLang="en-US" smtClean="0"/>
+              <a:rPr lang="zh-TW" altLang="en-US"/>
               <a:t>第二層</a:t>
             </a:r>
           </a:p>
           <a:p>
             <a:pPr lvl="2"/>
             <a:r>
-              <a:rPr lang="zh-TW" altLang="en-US" smtClean="0"/>
+              <a:rPr lang="zh-TW" altLang="en-US"/>
               <a:t>第三層</a:t>
             </a:r>
           </a:p>
           <a:p>
             <a:pPr lvl="3"/>
             <a:r>
-              <a:rPr lang="zh-TW" altLang="en-US" smtClean="0"/>
+              <a:rPr lang="zh-TW" altLang="en-US"/>
               <a:t>第四層</a:t>
             </a:r>
           </a:p>
           <a:p>
             <a:pPr lvl="4"/>
             <a:r>
-              <a:rPr lang="zh-TW" altLang="en-US" smtClean="0"/>
+              <a:rPr lang="zh-TW" altLang="en-US"/>
               <a:t>第五層</a:t>
             </a:r>
-            <a:endParaRPr lang="zh-TW" altLang="en-US"/>
           </a:p>
         </p:txBody>
       </p:sp>
@@ -1645,7 +1636,7 @@
           <a:p>
             <a:pPr lvl="0"/>
             <a:r>
-              <a:rPr lang="zh-TW" altLang="en-US" smtClean="0"/>
+              <a:rPr lang="zh-TW" altLang="en-US"/>
               <a:t>按一下以編輯母片文字樣式</a:t>
             </a:r>
           </a:p>
@@ -1701,38 +1692,37 @@
           <a:p>
             <a:pPr lvl="0"/>
             <a:r>
-              <a:rPr lang="zh-TW" altLang="en-US" smtClean="0"/>
+              <a:rPr lang="zh-TW" altLang="en-US"/>
               <a:t>按一下以編輯母片文字樣式</a:t>
             </a:r>
           </a:p>
           <a:p>
             <a:pPr lvl="1"/>
             <a:r>
-              <a:rPr lang="zh-TW" altLang="en-US" smtClean="0"/>
+              <a:rPr lang="zh-TW" altLang="en-US"/>
               <a:t>第二層</a:t>
             </a:r>
           </a:p>
           <a:p>
             <a:pPr lvl="2"/>
             <a:r>
-              <a:rPr lang="zh-TW" altLang="en-US" smtClean="0"/>
+              <a:rPr lang="zh-TW" altLang="en-US"/>
               <a:t>第三層</a:t>
             </a:r>
           </a:p>
           <a:p>
             <a:pPr lvl="3"/>
             <a:r>
-              <a:rPr lang="zh-TW" altLang="en-US" smtClean="0"/>
+              <a:rPr lang="zh-TW" altLang="en-US"/>
               <a:t>第四層</a:t>
             </a:r>
           </a:p>
           <a:p>
             <a:pPr lvl="4"/>
             <a:r>
-              <a:rPr lang="zh-TW" altLang="en-US" smtClean="0"/>
+              <a:rPr lang="zh-TW" altLang="en-US"/>
               <a:t>第五層</a:t>
             </a:r>
-            <a:endParaRPr lang="zh-TW" altLang="en-US"/>
           </a:p>
         </p:txBody>
       </p:sp>
@@ -1753,7 +1743,7 @@
           <a:p>
             <a:fld id="{8117E584-0345-455E-92E5-C83A03908D5D}" type="datetimeFigureOut">
               <a:rPr lang="zh-TW" altLang="en-US" smtClean="0"/>
-              <a:t>2020/7/18</a:t>
+              <a:t>2025/1/26</a:t>
             </a:fld>
             <a:endParaRPr lang="zh-TW" altLang="en-US"/>
           </a:p>
@@ -1842,10 +1832,9 @@
           <a:lstStyle/>
           <a:p>
             <a:r>
-              <a:rPr lang="zh-TW" altLang="en-US" smtClean="0"/>
+              <a:rPr lang="zh-TW" altLang="en-US"/>
               <a:t>按一下以編輯母片標題樣式</a:t>
             </a:r>
-            <a:endParaRPr lang="zh-TW" altLang="en-US"/>
           </a:p>
         </p:txBody>
       </p:sp>
@@ -1866,7 +1855,7 @@
           <a:p>
             <a:fld id="{8117E584-0345-455E-92E5-C83A03908D5D}" type="datetimeFigureOut">
               <a:rPr lang="zh-TW" altLang="en-US" smtClean="0"/>
-              <a:t>2020/7/18</a:t>
+              <a:t>2025/1/26</a:t>
             </a:fld>
             <a:endParaRPr lang="zh-TW" altLang="en-US"/>
           </a:p>
@@ -1956,7 +1945,7 @@
           <a:p>
             <a:fld id="{8117E584-0345-455E-92E5-C83A03908D5D}" type="datetimeFigureOut">
               <a:rPr lang="zh-TW" altLang="en-US" smtClean="0"/>
-              <a:t>2020/7/18</a:t>
+              <a:t>2025/1/26</a:t>
             </a:fld>
             <a:endParaRPr lang="zh-TW" altLang="en-US"/>
           </a:p>
@@ -2054,10 +2043,9 @@
           </a:lstStyle>
           <a:p>
             <a:r>
-              <a:rPr lang="zh-TW" altLang="en-US" smtClean="0"/>
+              <a:rPr lang="zh-TW" altLang="en-US"/>
               <a:t>按一下以編輯母片標題樣式</a:t>
             </a:r>
-            <a:endParaRPr lang="zh-TW" altLang="en-US"/>
           </a:p>
         </p:txBody>
       </p:sp>
@@ -2111,38 +2099,37 @@
           <a:p>
             <a:pPr lvl="0"/>
             <a:r>
-              <a:rPr lang="zh-TW" altLang="en-US" smtClean="0"/>
+              <a:rPr lang="zh-TW" altLang="en-US"/>
               <a:t>按一下以編輯母片文字樣式</a:t>
             </a:r>
           </a:p>
           <a:p>
             <a:pPr lvl="1"/>
             <a:r>
-              <a:rPr lang="zh-TW" altLang="en-US" smtClean="0"/>
+              <a:rPr lang="zh-TW" altLang="en-US"/>
               <a:t>第二層</a:t>
             </a:r>
           </a:p>
           <a:p>
             <a:pPr lvl="2"/>
             <a:r>
-              <a:rPr lang="zh-TW" altLang="en-US" smtClean="0"/>
+              <a:rPr lang="zh-TW" altLang="en-US"/>
               <a:t>第三層</a:t>
             </a:r>
           </a:p>
           <a:p>
             <a:pPr lvl="3"/>
             <a:r>
-              <a:rPr lang="zh-TW" altLang="en-US" smtClean="0"/>
+              <a:rPr lang="zh-TW" altLang="en-US"/>
               <a:t>第四層</a:t>
             </a:r>
           </a:p>
           <a:p>
             <a:pPr lvl="4"/>
             <a:r>
-              <a:rPr lang="zh-TW" altLang="en-US" smtClean="0"/>
+              <a:rPr lang="zh-TW" altLang="en-US"/>
               <a:t>第五層</a:t>
             </a:r>
-            <a:endParaRPr lang="zh-TW" altLang="en-US"/>
           </a:p>
         </p:txBody>
       </p:sp>
@@ -2205,7 +2192,7 @@
           <a:p>
             <a:pPr lvl="0"/>
             <a:r>
-              <a:rPr lang="zh-TW" altLang="en-US" smtClean="0"/>
+              <a:rPr lang="zh-TW" altLang="en-US"/>
               <a:t>按一下以編輯母片文字樣式</a:t>
             </a:r>
           </a:p>
@@ -2228,7 +2215,7 @@
           <a:p>
             <a:fld id="{8117E584-0345-455E-92E5-C83A03908D5D}" type="datetimeFigureOut">
               <a:rPr lang="zh-TW" altLang="en-US" smtClean="0"/>
-              <a:t>2020/7/18</a:t>
+              <a:t>2025/1/26</a:t>
             </a:fld>
             <a:endParaRPr lang="zh-TW" altLang="en-US"/>
           </a:p>
@@ -2326,10 +2313,9 @@
           </a:lstStyle>
           <a:p>
             <a:r>
-              <a:rPr lang="zh-TW" altLang="en-US" smtClean="0"/>
+              <a:rPr lang="zh-TW" altLang="en-US"/>
               <a:t>按一下以編輯母片標題樣式</a:t>
             </a:r>
-            <a:endParaRPr lang="zh-TW" altLang="en-US"/>
           </a:p>
         </p:txBody>
       </p:sp>
@@ -2391,10 +2377,9 @@
           </a:lstStyle>
           <a:p>
             <a:r>
-              <a:rPr lang="zh-TW" altLang="en-US" smtClean="0"/>
+              <a:rPr lang="zh-TW" altLang="en-US"/>
               <a:t>按一下圖示以新增圖片</a:t>
             </a:r>
-            <a:endParaRPr lang="zh-TW" altLang="en-US"/>
           </a:p>
         </p:txBody>
       </p:sp>
@@ -2457,7 +2442,7 @@
           <a:p>
             <a:pPr lvl="0"/>
             <a:r>
-              <a:rPr lang="zh-TW" altLang="en-US" smtClean="0"/>
+              <a:rPr lang="zh-TW" altLang="en-US"/>
               <a:t>按一下以編輯母片文字樣式</a:t>
             </a:r>
           </a:p>
@@ -2480,7 +2465,7 @@
           <a:p>
             <a:fld id="{8117E584-0345-455E-92E5-C83A03908D5D}" type="datetimeFigureOut">
               <a:rPr lang="zh-TW" altLang="en-US" smtClean="0"/>
-              <a:t>2020/7/18</a:t>
+              <a:t>2025/1/26</a:t>
             </a:fld>
             <a:endParaRPr lang="zh-TW" altLang="en-US"/>
           </a:p>
@@ -2589,10 +2574,9 @@
           <a:lstStyle/>
           <a:p>
             <a:r>
-              <a:rPr lang="zh-TW" altLang="en-US" smtClean="0"/>
+              <a:rPr lang="zh-TW" altLang="en-US"/>
               <a:t>按一下以編輯母片標題樣式</a:t>
             </a:r>
-            <a:endParaRPr lang="zh-TW" altLang="en-US"/>
           </a:p>
         </p:txBody>
       </p:sp>
@@ -2623,38 +2607,37 @@
           <a:p>
             <a:pPr lvl="0"/>
             <a:r>
-              <a:rPr lang="zh-TW" altLang="en-US" smtClean="0"/>
+              <a:rPr lang="zh-TW" altLang="en-US"/>
               <a:t>按一下以編輯母片文字樣式</a:t>
             </a:r>
           </a:p>
           <a:p>
             <a:pPr lvl="1"/>
             <a:r>
-              <a:rPr lang="zh-TW" altLang="en-US" smtClean="0"/>
+              <a:rPr lang="zh-TW" altLang="en-US"/>
               <a:t>第二層</a:t>
             </a:r>
           </a:p>
           <a:p>
             <a:pPr lvl="2"/>
             <a:r>
-              <a:rPr lang="zh-TW" altLang="en-US" smtClean="0"/>
+              <a:rPr lang="zh-TW" altLang="en-US"/>
               <a:t>第三層</a:t>
             </a:r>
           </a:p>
           <a:p>
             <a:pPr lvl="3"/>
             <a:r>
-              <a:rPr lang="zh-TW" altLang="en-US" smtClean="0"/>
+              <a:rPr lang="zh-TW" altLang="en-US"/>
               <a:t>第四層</a:t>
             </a:r>
           </a:p>
           <a:p>
             <a:pPr lvl="4"/>
             <a:r>
-              <a:rPr lang="zh-TW" altLang="en-US" smtClean="0"/>
+              <a:rPr lang="zh-TW" altLang="en-US"/>
               <a:t>第五層</a:t>
             </a:r>
-            <a:endParaRPr lang="zh-TW" altLang="en-US"/>
           </a:p>
         </p:txBody>
       </p:sp>
@@ -2693,7 +2676,7 @@
           <a:p>
             <a:fld id="{8117E584-0345-455E-92E5-C83A03908D5D}" type="datetimeFigureOut">
               <a:rPr lang="zh-TW" altLang="en-US" smtClean="0"/>
-              <a:t>2020/7/18</a:t>
+              <a:t>2025/1/26</a:t>
             </a:fld>
             <a:endParaRPr lang="zh-TW" altLang="en-US"/>
           </a:p>
@@ -3073,261 +3056,34 @@
             <p:ph type="title"/>
           </p:nvPr>
         </p:nvSpPr>
-        <p:spPr/>
-        <p:txBody>
-          <a:bodyPr>
-            <a:normAutofit/>
-          </a:bodyPr>
-          <a:lstStyle/>
-          <a:p>
-            <a:r>
-              <a:rPr lang="zh-TW" altLang="en-US" sz="4000" b="1" dirty="0">
-                <a:solidFill>
-                  <a:srgbClr val="660033"/>
-                </a:solidFill>
-                <a:latin typeface="微軟正黑體" pitchFamily="34" charset="-120"/>
-                <a:ea typeface="微軟正黑體" pitchFamily="34" charset="-120"/>
-              </a:rPr>
-              <a:t>萬國得</a:t>
-            </a:r>
-            <a:r>
-              <a:rPr lang="zh-TW" altLang="en-US" sz="4000" b="1" dirty="0" smtClean="0">
-                <a:solidFill>
-                  <a:srgbClr val="660033"/>
-                </a:solidFill>
-                <a:latin typeface="微軟正黑體" pitchFamily="34" charset="-120"/>
-                <a:ea typeface="微軟正黑體" pitchFamily="34" charset="-120"/>
-              </a:rPr>
-              <a:t>知</a:t>
-            </a:r>
-            <a:r>
-              <a:rPr lang="zh-CN" altLang="en-US" sz="4000" b="1" dirty="0" smtClean="0">
-                <a:solidFill>
-                  <a:srgbClr val="660033"/>
-                </a:solidFill>
-                <a:latin typeface="微軟正黑體" pitchFamily="34" charset="-120"/>
-                <a:ea typeface="微軟正黑體" pitchFamily="34" charset="-120"/>
-              </a:rPr>
-              <a:t>袮</a:t>
-            </a:r>
-            <a:r>
-              <a:rPr lang="zh-TW" altLang="en-US" sz="4000" b="1" dirty="0" smtClean="0">
-                <a:solidFill>
-                  <a:srgbClr val="660033"/>
-                </a:solidFill>
-                <a:latin typeface="微軟正黑體" pitchFamily="34" charset="-120"/>
-                <a:ea typeface="微軟正黑體" pitchFamily="34" charset="-120"/>
-              </a:rPr>
-              <a:t>的</a:t>
-            </a:r>
-            <a:r>
-              <a:rPr lang="zh-TW" altLang="en-US" sz="4000" b="1" dirty="0">
-                <a:solidFill>
-                  <a:srgbClr val="660033"/>
-                </a:solidFill>
-                <a:latin typeface="微軟正黑體" pitchFamily="34" charset="-120"/>
-                <a:ea typeface="微軟正黑體" pitchFamily="34" charset="-120"/>
-              </a:rPr>
-              <a:t>救恩</a:t>
-            </a:r>
-          </a:p>
-        </p:txBody>
-      </p:sp>
-      <p:sp>
-        <p:nvSpPr>
-          <p:cNvPr id="5" name="內容版面配置區 4"/>
-          <p:cNvSpPr>
-            <a:spLocks noGrp="1"/>
-          </p:cNvSpPr>
-          <p:nvPr>
-            <p:ph idx="1"/>
-          </p:nvPr>
-        </p:nvSpPr>
-        <p:spPr/>
+        <p:spPr>
+          <a:xfrm>
+            <a:off x="0" y="1995686"/>
+            <a:ext cx="9144000" cy="857250"/>
+          </a:xfrm>
+        </p:spPr>
         <p:txBody>
           <a:bodyPr>
             <a:noAutofit/>
           </a:bodyPr>
           <a:lstStyle/>
           <a:p>
-            <a:pPr algn="ctr">
-              <a:buNone/>
-            </a:pPr>
-            <a:r>
-              <a:rPr lang="zh-TW" altLang="en-US" sz="4800" b="1" dirty="0" smtClean="0">
-                <a:solidFill>
-                  <a:srgbClr val="660033"/>
-                </a:solidFill>
+            <a:r>
+              <a:rPr lang="zh-TW" altLang="en-US" sz="5400" b="1" i="1" dirty="0">
+                <a:solidFill>
+                  <a:srgbClr val="660033"/>
+                </a:solidFill>
+                <a:effectLst>
+                  <a:outerShdw blurRad="38100" dist="38100" dir="2700000" algn="tl">
+                    <a:srgbClr val="000000">
+                      <a:alpha val="43137"/>
+                    </a:srgbClr>
+                  </a:outerShdw>
+                </a:effectLst>
                 <a:latin typeface="微軟正黑體" pitchFamily="34" charset="-120"/>
                 <a:ea typeface="微軟正黑體" pitchFamily="34" charset="-120"/>
               </a:rPr>
-              <a:t>主</a:t>
-            </a:r>
-            <a:r>
-              <a:rPr lang="zh-CN" altLang="en-US" sz="4800" b="1" dirty="0">
-                <a:solidFill>
-                  <a:srgbClr val="660033"/>
-                </a:solidFill>
-                <a:latin typeface="微軟正黑體" pitchFamily="34" charset="-120"/>
-                <a:ea typeface="微軟正黑體" pitchFamily="34" charset="-120"/>
-              </a:rPr>
-              <a:t>袮</a:t>
-            </a:r>
-            <a:r>
-              <a:rPr lang="zh-TW" altLang="en-US" sz="4800" b="1" dirty="0" smtClean="0">
-                <a:solidFill>
-                  <a:srgbClr val="660033"/>
-                </a:solidFill>
-                <a:latin typeface="微軟正黑體" pitchFamily="34" charset="-120"/>
-                <a:ea typeface="微軟正黑體" pitchFamily="34" charset="-120"/>
-              </a:rPr>
-              <a:t>造</a:t>
-            </a:r>
-            <a:r>
-              <a:rPr lang="zh-TW" altLang="en-US" sz="4800" b="1" dirty="0">
-                <a:solidFill>
-                  <a:srgbClr val="660033"/>
-                </a:solidFill>
-                <a:latin typeface="微軟正黑體" pitchFamily="34" charset="-120"/>
-                <a:ea typeface="微軟正黑體" pitchFamily="34" charset="-120"/>
-              </a:rPr>
-              <a:t>諸</a:t>
-            </a:r>
-            <a:r>
-              <a:rPr lang="zh-TW" altLang="en-US" sz="4800" b="1" dirty="0" smtClean="0">
-                <a:solidFill>
-                  <a:srgbClr val="660033"/>
-                </a:solidFill>
-                <a:latin typeface="微軟正黑體" pitchFamily="34" charset="-120"/>
-                <a:ea typeface="微軟正黑體" pitchFamily="34" charset="-120"/>
-              </a:rPr>
-              <a:t>天  鋪開大地</a:t>
-            </a:r>
-            <a:endParaRPr lang="en-US" altLang="zh-TW" sz="4800" b="1" dirty="0" smtClean="0">
-              <a:solidFill>
-                <a:srgbClr val="660033"/>
-              </a:solidFill>
-              <a:latin typeface="微軟正黑體" pitchFamily="34" charset="-120"/>
-              <a:ea typeface="微軟正黑體" pitchFamily="34" charset="-120"/>
-            </a:endParaRPr>
-          </a:p>
-          <a:p>
-            <a:pPr algn="ctr">
-              <a:buNone/>
-            </a:pPr>
-            <a:r>
-              <a:rPr lang="zh-TW" altLang="en-US" sz="4800" b="1" dirty="0" smtClean="0">
-                <a:solidFill>
-                  <a:srgbClr val="660033"/>
-                </a:solidFill>
-                <a:latin typeface="微軟正黑體" pitchFamily="34" charset="-120"/>
-                <a:ea typeface="微軟正黑體" pitchFamily="34" charset="-120"/>
-              </a:rPr>
-              <a:t>高</a:t>
-            </a:r>
-            <a:r>
-              <a:rPr lang="zh-TW" altLang="en-US" sz="4800" b="1" dirty="0">
-                <a:solidFill>
-                  <a:srgbClr val="660033"/>
-                </a:solidFill>
-                <a:latin typeface="微軟正黑體" pitchFamily="34" charset="-120"/>
-                <a:ea typeface="微軟正黑體" pitchFamily="34" charset="-120"/>
-              </a:rPr>
-              <a:t>坐在施恩寶座</a:t>
-            </a:r>
-            <a:r>
-              <a:rPr lang="zh-TW" altLang="en-US" sz="4800" b="1" dirty="0" smtClean="0">
-                <a:solidFill>
-                  <a:srgbClr val="660033"/>
-                </a:solidFill>
-                <a:latin typeface="微軟正黑體" pitchFamily="34" charset="-120"/>
-                <a:ea typeface="微軟正黑體" pitchFamily="34" charset="-120"/>
-              </a:rPr>
-              <a:t>上</a:t>
-            </a:r>
-            <a:endParaRPr lang="en-US" altLang="zh-TW" sz="4800" b="1" dirty="0">
-              <a:solidFill>
-                <a:srgbClr val="660033"/>
-              </a:solidFill>
-              <a:latin typeface="微軟正黑體" pitchFamily="34" charset="-120"/>
-              <a:ea typeface="微軟正黑體" pitchFamily="34" charset="-120"/>
-            </a:endParaRPr>
-          </a:p>
-          <a:p>
-            <a:pPr algn="ctr">
-              <a:buNone/>
-            </a:pPr>
-            <a:r>
-              <a:rPr lang="zh-TW" altLang="en-US" sz="4800" b="1" dirty="0" smtClean="0">
-                <a:solidFill>
-                  <a:srgbClr val="660033"/>
-                </a:solidFill>
-                <a:latin typeface="微軟正黑體" pitchFamily="34" charset="-120"/>
-                <a:ea typeface="微軟正黑體" pitchFamily="34" charset="-120"/>
-              </a:rPr>
-              <a:t>公</a:t>
-            </a:r>
-            <a:r>
-              <a:rPr lang="zh-TW" altLang="en-US" sz="4800" b="1" dirty="0">
-                <a:solidFill>
-                  <a:srgbClr val="660033"/>
-                </a:solidFill>
-                <a:latin typeface="微軟正黑體" pitchFamily="34" charset="-120"/>
-                <a:ea typeface="微軟正黑體" pitchFamily="34" charset="-120"/>
-              </a:rPr>
-              <a:t>義</a:t>
-            </a:r>
-            <a:r>
-              <a:rPr lang="zh-TW" altLang="en-US" sz="4800" b="1" dirty="0" smtClean="0">
-                <a:solidFill>
-                  <a:srgbClr val="660033"/>
-                </a:solidFill>
-                <a:latin typeface="微軟正黑體" pitchFamily="34" charset="-120"/>
-                <a:ea typeface="微軟正黑體" pitchFamily="34" charset="-120"/>
-              </a:rPr>
-              <a:t>發出 儼如光輝</a:t>
-            </a:r>
-            <a:endParaRPr lang="en-US" altLang="zh-TW" sz="4800" b="1" dirty="0" smtClean="0">
-              <a:solidFill>
-                <a:srgbClr val="660033"/>
-              </a:solidFill>
-              <a:latin typeface="微軟正黑體" pitchFamily="34" charset="-120"/>
-              <a:ea typeface="微軟正黑體" pitchFamily="34" charset="-120"/>
-            </a:endParaRPr>
-          </a:p>
-          <a:p>
-            <a:pPr algn="ctr">
-              <a:buNone/>
-            </a:pPr>
-            <a:r>
-              <a:rPr lang="zh-CN" altLang="en-US" sz="4800" b="1" dirty="0">
-                <a:solidFill>
-                  <a:srgbClr val="660033"/>
-                </a:solidFill>
-                <a:latin typeface="微軟正黑體" pitchFamily="34" charset="-120"/>
-                <a:ea typeface="微軟正黑體" pitchFamily="34" charset="-120"/>
-              </a:rPr>
-              <a:t>袮</a:t>
-            </a:r>
-            <a:r>
-              <a:rPr lang="zh-TW" altLang="en-US" sz="4800" b="1" dirty="0" smtClean="0">
-                <a:solidFill>
-                  <a:srgbClr val="660033"/>
-                </a:solidFill>
-                <a:latin typeface="微軟正黑體" pitchFamily="34" charset="-120"/>
-                <a:ea typeface="微軟正黑體" pitchFamily="34" charset="-120"/>
-              </a:rPr>
-              <a:t>的</a:t>
-            </a:r>
-            <a:r>
-              <a:rPr lang="zh-TW" altLang="en-US" sz="4800" b="1" dirty="0">
-                <a:solidFill>
-                  <a:srgbClr val="660033"/>
-                </a:solidFill>
-                <a:latin typeface="微軟正黑體" pitchFamily="34" charset="-120"/>
-                <a:ea typeface="微軟正黑體" pitchFamily="34" charset="-120"/>
-              </a:rPr>
-              <a:t>救恩如明燈閃亮</a:t>
+              <a:t>萬國得知祢的救恩</a:t>
             </a:r>
           </a:p>
         </p:txBody>
@@ -3359,230 +3115,116 @@
       </p:grpSpPr>
       <p:sp>
         <p:nvSpPr>
-          <p:cNvPr id="4" name="標題 3"/>
-          <p:cNvSpPr>
-            <a:spLocks noGrp="1"/>
-          </p:cNvSpPr>
-          <p:nvPr>
-            <p:ph type="title"/>
-          </p:nvPr>
-        </p:nvSpPr>
-        <p:spPr/>
-        <p:txBody>
-          <a:bodyPr>
+          <p:cNvPr id="5" name="內容版面配置區 4"/>
+          <p:cNvSpPr>
+            <a:spLocks noGrp="1"/>
+          </p:cNvSpPr>
+          <p:nvPr>
+            <p:ph idx="1"/>
+          </p:nvPr>
+        </p:nvSpPr>
+        <p:spPr>
+          <a:xfrm>
+            <a:off x="0" y="1563639"/>
+            <a:ext cx="9144000" cy="1803647"/>
+          </a:xfrm>
+        </p:spPr>
+        <p:txBody>
+          <a:bodyPr anchor="ctr">
             <a:normAutofit/>
           </a:bodyPr>
           <a:lstStyle/>
           <a:p>
-            <a:r>
-              <a:rPr lang="zh-TW" altLang="en-US" sz="4000" b="1" dirty="0">
+            <a:pPr algn="ctr">
+              <a:buNone/>
+            </a:pPr>
+            <a:r>
+              <a:rPr lang="zh-TW" altLang="en-US" sz="4800" b="1" dirty="0">
                 <a:solidFill>
                   <a:srgbClr val="660033"/>
                 </a:solidFill>
                 <a:latin typeface="微軟正黑體" pitchFamily="34" charset="-120"/>
                 <a:ea typeface="微軟正黑體" pitchFamily="34" charset="-120"/>
               </a:rPr>
-              <a:t>萬國得</a:t>
-            </a:r>
-            <a:r>
-              <a:rPr lang="zh-TW" altLang="en-US" sz="4000" b="1" dirty="0" smtClean="0">
+              <a:t>主祢造諸天  鋪開大地</a:t>
+            </a:r>
+          </a:p>
+          <a:p>
+            <a:pPr algn="ctr">
+              <a:buNone/>
+            </a:pPr>
+            <a:r>
+              <a:rPr lang="zh-TW" altLang="en-US" sz="4800" b="1" dirty="0">
                 <a:solidFill>
                   <a:srgbClr val="660033"/>
                 </a:solidFill>
                 <a:latin typeface="微軟正黑體" pitchFamily="34" charset="-120"/>
                 <a:ea typeface="微軟正黑體" pitchFamily="34" charset="-120"/>
               </a:rPr>
-              <a:t>知</a:t>
-            </a:r>
-            <a:r>
-              <a:rPr lang="zh-CN" altLang="en-US" sz="4000" b="1" dirty="0">
-                <a:solidFill>
-                  <a:srgbClr val="660033"/>
-                </a:solidFill>
-                <a:latin typeface="微軟正黑體" pitchFamily="34" charset="-120"/>
-                <a:ea typeface="微軟正黑體" pitchFamily="34" charset="-120"/>
-              </a:rPr>
-              <a:t>袮</a:t>
-            </a:r>
-            <a:r>
-              <a:rPr lang="zh-TW" altLang="en-US" sz="4000" b="1" dirty="0" smtClean="0">
-                <a:solidFill>
-                  <a:srgbClr val="660033"/>
-                </a:solidFill>
-                <a:latin typeface="微軟正黑體" pitchFamily="34" charset="-120"/>
-                <a:ea typeface="微軟正黑體" pitchFamily="34" charset="-120"/>
-              </a:rPr>
-              <a:t>的</a:t>
-            </a:r>
-            <a:r>
-              <a:rPr lang="zh-TW" altLang="en-US" sz="4000" b="1" dirty="0">
-                <a:solidFill>
-                  <a:srgbClr val="660033"/>
-                </a:solidFill>
-                <a:latin typeface="微軟正黑體" pitchFamily="34" charset="-120"/>
-                <a:ea typeface="微軟正黑體" pitchFamily="34" charset="-120"/>
-              </a:rPr>
-              <a:t>救恩</a:t>
-            </a:r>
-          </a:p>
-        </p:txBody>
-      </p:sp>
-      <p:sp>
-        <p:nvSpPr>
-          <p:cNvPr id="5" name="內容版面配置區 4"/>
-          <p:cNvSpPr>
-            <a:spLocks noGrp="1"/>
-          </p:cNvSpPr>
-          <p:nvPr>
-            <p:ph idx="1"/>
-          </p:nvPr>
-        </p:nvSpPr>
-        <p:spPr/>
-        <p:txBody>
-          <a:bodyPr>
-            <a:noAutofit/>
+              <a:t>高坐在施恩寶座上</a:t>
+            </a:r>
+          </a:p>
+        </p:txBody>
+      </p:sp>
+      <p:sp>
+        <p:nvSpPr>
+          <p:cNvPr id="3" name="TextBox 2"/>
+          <p:cNvSpPr txBox="1"/>
+          <p:nvPr/>
+        </p:nvSpPr>
+        <p:spPr>
+          <a:xfrm>
+            <a:off x="0" y="3867895"/>
+            <a:ext cx="9144000" cy="461665"/>
+          </a:xfrm>
+          <a:prstGeom prst="rect">
+            <a:avLst/>
+          </a:prstGeom>
+          <a:noFill/>
+        </p:spPr>
+        <p:txBody>
+          <a:bodyPr wrap="square" rtlCol="0">
+            <a:spAutoFit/>
           </a:bodyPr>
           <a:lstStyle/>
           <a:p>
-            <a:pPr algn="ctr">
-              <a:buNone/>
-            </a:pPr>
-            <a:r>
-              <a:rPr lang="zh-CN" altLang="en-US" sz="4800" b="1" dirty="0">
-                <a:solidFill>
-                  <a:srgbClr val="660033"/>
-                </a:solidFill>
-                <a:latin typeface="微軟正黑體" pitchFamily="34" charset="-120"/>
-                <a:ea typeface="微軟正黑體" pitchFamily="34" charset="-120"/>
-              </a:rPr>
-              <a:t>袮</a:t>
-            </a:r>
-            <a:r>
-              <a:rPr lang="zh-TW" altLang="en-US" sz="4800" b="1" dirty="0" smtClean="0">
-                <a:solidFill>
-                  <a:srgbClr val="660033"/>
-                </a:solidFill>
-                <a:latin typeface="微軟正黑體" pitchFamily="34" charset="-120"/>
-                <a:ea typeface="微軟正黑體" pitchFamily="34" charset="-120"/>
-              </a:rPr>
-              <a:t>的</a:t>
-            </a:r>
-            <a:r>
-              <a:rPr lang="zh-TW" altLang="en-US" sz="4800" b="1" dirty="0">
-                <a:solidFill>
-                  <a:srgbClr val="660033"/>
-                </a:solidFill>
-                <a:latin typeface="微軟正黑體" pitchFamily="34" charset="-120"/>
-                <a:ea typeface="微軟正黑體" pitchFamily="34" charset="-120"/>
-              </a:rPr>
-              <a:t>臂膀  大有能力</a:t>
-            </a:r>
-            <a:endParaRPr lang="en-US" altLang="zh-TW" sz="4800" b="1" dirty="0">
+            <a:pPr algn="ctr"/>
+            <a:r>
+              <a:rPr lang="en-US" sz="2400" b="1" dirty="0">
+                <a:solidFill>
+                  <a:srgbClr val="660033"/>
+                </a:solidFill>
+                <a:latin typeface="Microsoft JhengHei" panose="020B0604030504040204" pitchFamily="34" charset="-120"/>
+                <a:ea typeface="Microsoft JhengHei" panose="020B0604030504040204" pitchFamily="34" charset="-120"/>
+              </a:rPr>
+              <a:t>( </a:t>
+            </a:r>
+            <a:r>
+              <a:rPr lang="zh-CN" altLang="en-US" sz="2400" b="1" dirty="0">
+                <a:solidFill>
+                  <a:srgbClr val="660033"/>
+                </a:solidFill>
+                <a:latin typeface="Microsoft JhengHei" panose="020B0604030504040204" pitchFamily="34" charset="-120"/>
+                <a:ea typeface="Microsoft JhengHei" panose="020B0604030504040204" pitchFamily="34" charset="-120"/>
+              </a:rPr>
+              <a:t>正歌</a:t>
+            </a:r>
+            <a:r>
+              <a:rPr lang="en-US" sz="2400" b="1" dirty="0">
+                <a:solidFill>
+                  <a:srgbClr val="660033"/>
+                </a:solidFill>
+                <a:latin typeface="Microsoft JhengHei" panose="020B0604030504040204" pitchFamily="34" charset="-120"/>
+                <a:ea typeface="Microsoft JhengHei" panose="020B0604030504040204" pitchFamily="34" charset="-120"/>
+              </a:rPr>
+              <a:t> )</a:t>
+            </a:r>
+            <a:endParaRPr lang="vi-VN" sz="2400" b="1" dirty="0">
               <a:solidFill>
                 <a:srgbClr val="660033"/>
               </a:solidFill>
-              <a:latin typeface="微軟正黑體" pitchFamily="34" charset="-120"/>
-              <a:ea typeface="微軟正黑體" pitchFamily="34" charset="-120"/>
+              <a:ea typeface="Microsoft JhengHei" panose="020B0604030504040204" pitchFamily="34" charset="-120"/>
             </a:endParaRPr>
-          </a:p>
-          <a:p>
-            <a:pPr algn="ctr">
-              <a:buNone/>
-            </a:pPr>
-            <a:r>
-              <a:rPr lang="zh-CN" altLang="en-US" sz="4800" b="1" dirty="0" smtClean="0">
-                <a:solidFill>
-                  <a:srgbClr val="660033"/>
-                </a:solidFill>
-                <a:latin typeface="微軟正黑體" pitchFamily="34" charset="-120"/>
-                <a:ea typeface="微軟正黑體" pitchFamily="34" charset="-120"/>
-              </a:rPr>
-              <a:t>袮</a:t>
-            </a:r>
-            <a:r>
-              <a:rPr lang="zh-TW" altLang="en-US" sz="4800" b="1" dirty="0" smtClean="0">
-                <a:solidFill>
-                  <a:srgbClr val="660033"/>
-                </a:solidFill>
-                <a:latin typeface="微軟正黑體" pitchFamily="34" charset="-120"/>
-                <a:ea typeface="微軟正黑體" pitchFamily="34" charset="-120"/>
-              </a:rPr>
-              <a:t>殿</a:t>
-            </a:r>
-            <a:r>
-              <a:rPr lang="zh-TW" altLang="en-US" sz="4800" b="1" dirty="0">
-                <a:solidFill>
-                  <a:srgbClr val="660033"/>
-                </a:solidFill>
-                <a:latin typeface="微軟正黑體" pitchFamily="34" charset="-120"/>
-                <a:ea typeface="微軟正黑體" pitchFamily="34" charset="-120"/>
-              </a:rPr>
-              <a:t>宇高大輝煌</a:t>
-            </a:r>
-            <a:endParaRPr lang="en-US" altLang="zh-TW" sz="4800" b="1" dirty="0">
-              <a:solidFill>
-                <a:srgbClr val="660033"/>
-              </a:solidFill>
-              <a:latin typeface="微軟正黑體" pitchFamily="34" charset="-120"/>
-              <a:ea typeface="微軟正黑體" pitchFamily="34" charset="-120"/>
-            </a:endParaRPr>
-          </a:p>
-          <a:p>
-            <a:pPr algn="ctr">
-              <a:buNone/>
-            </a:pPr>
-            <a:r>
-              <a:rPr lang="zh-TW" altLang="en-US" sz="4800" b="1" dirty="0">
-                <a:solidFill>
-                  <a:srgbClr val="660033"/>
-                </a:solidFill>
-                <a:latin typeface="微軟正黑體" pitchFamily="34" charset="-120"/>
-                <a:ea typeface="微軟正黑體" pitchFamily="34" charset="-120"/>
-              </a:rPr>
-              <a:t>普天之下  萬國的神</a:t>
-            </a:r>
-            <a:endParaRPr lang="en-US" altLang="zh-TW" sz="4800" b="1" dirty="0">
-              <a:solidFill>
-                <a:srgbClr val="660033"/>
-              </a:solidFill>
-              <a:latin typeface="微軟正黑體" pitchFamily="34" charset="-120"/>
-              <a:ea typeface="微軟正黑體" pitchFamily="34" charset="-120"/>
-            </a:endParaRPr>
-          </a:p>
-          <a:p>
-            <a:pPr algn="ctr">
-              <a:buNone/>
-            </a:pPr>
-            <a:r>
-              <a:rPr lang="zh-CN" altLang="en-US" sz="4800" b="1" dirty="0" smtClean="0">
-                <a:solidFill>
-                  <a:srgbClr val="660033"/>
-                </a:solidFill>
-                <a:latin typeface="微軟正黑體" pitchFamily="34" charset="-120"/>
-                <a:ea typeface="微軟正黑體" pitchFamily="34" charset="-120"/>
-              </a:rPr>
-              <a:t>袮</a:t>
-            </a:r>
-            <a:r>
-              <a:rPr lang="zh-TW" altLang="en-US" sz="4800" b="1" dirty="0" smtClean="0">
-                <a:solidFill>
-                  <a:srgbClr val="660033"/>
-                </a:solidFill>
-                <a:latin typeface="微軟正黑體" pitchFamily="34" charset="-120"/>
-                <a:ea typeface="微軟正黑體" pitchFamily="34" charset="-120"/>
-              </a:rPr>
-              <a:t>慈</a:t>
-            </a:r>
-            <a:r>
-              <a:rPr lang="zh-TW" altLang="en-US" sz="4800" b="1" dirty="0">
-                <a:solidFill>
-                  <a:srgbClr val="660033"/>
-                </a:solidFill>
-                <a:latin typeface="微軟正黑體" pitchFamily="34" charset="-120"/>
-                <a:ea typeface="微軟正黑體" pitchFamily="34" charset="-120"/>
-              </a:rPr>
-              <a:t>愛充滿全地之上</a:t>
-            </a:r>
           </a:p>
         </p:txBody>
       </p:sp>
@@ -3599,7 +3241,13 @@
   <p:cSld>
     <p:spTree>
       <p:nvGrpSpPr>
-        <p:cNvPr id="1" name=""/>
+        <p:cNvPr id="1" name="">
+          <a:extLst>
+            <a:ext uri="{FF2B5EF4-FFF2-40B4-BE49-F238E27FC236}">
+              <a16:creationId xmlns:a16="http://schemas.microsoft.com/office/drawing/2014/main" id="{0EC6F39A-FCDE-0E49-74E0-34526C7DCEE5}"/>
+            </a:ext>
+          </a:extLst>
+        </p:cNvPr>
         <p:cNvGrpSpPr/>
         <p:nvPr/>
       </p:nvGrpSpPr>
@@ -3613,105 +3261,46 @@
       </p:grpSpPr>
       <p:sp>
         <p:nvSpPr>
-          <p:cNvPr id="4" name="標題 3"/>
-          <p:cNvSpPr>
-            <a:spLocks noGrp="1"/>
-          </p:cNvSpPr>
-          <p:nvPr>
-            <p:ph type="title"/>
-          </p:nvPr>
-        </p:nvSpPr>
-        <p:spPr/>
-        <p:txBody>
-          <a:bodyPr>
+          <p:cNvPr id="5" name="內容版面配置區 4">
+            <a:extLst>
+              <a:ext uri="{FF2B5EF4-FFF2-40B4-BE49-F238E27FC236}">
+                <a16:creationId xmlns:a16="http://schemas.microsoft.com/office/drawing/2014/main" id="{605D1B22-56EF-AE4A-208A-24123EC85587}"/>
+              </a:ext>
+            </a:extLst>
+          </p:cNvPr>
+          <p:cNvSpPr>
+            <a:spLocks noGrp="1"/>
+          </p:cNvSpPr>
+          <p:nvPr>
+            <p:ph idx="1"/>
+          </p:nvPr>
+        </p:nvSpPr>
+        <p:spPr>
+          <a:xfrm>
+            <a:off x="0" y="1563639"/>
+            <a:ext cx="9144000" cy="1803647"/>
+          </a:xfrm>
+        </p:spPr>
+        <p:txBody>
+          <a:bodyPr anchor="ctr">
             <a:normAutofit/>
           </a:bodyPr>
           <a:lstStyle/>
           <a:p>
-            <a:r>
-              <a:rPr lang="zh-TW" altLang="en-US" sz="4000" b="1" dirty="0">
+            <a:pPr algn="ctr">
+              <a:buNone/>
+            </a:pPr>
+            <a:r>
+              <a:rPr lang="zh-TW" altLang="en-US" sz="4950" b="1" dirty="0">
                 <a:solidFill>
                   <a:srgbClr val="660033"/>
                 </a:solidFill>
                 <a:latin typeface="微軟正黑體" pitchFamily="34" charset="-120"/>
                 <a:ea typeface="微軟正黑體" pitchFamily="34" charset="-120"/>
               </a:rPr>
-              <a:t>萬國得</a:t>
-            </a:r>
-            <a:r>
-              <a:rPr lang="zh-TW" altLang="en-US" sz="4000" b="1" dirty="0" smtClean="0">
-                <a:solidFill>
-                  <a:srgbClr val="660033"/>
-                </a:solidFill>
-                <a:latin typeface="微軟正黑體" pitchFamily="34" charset="-120"/>
-                <a:ea typeface="微軟正黑體" pitchFamily="34" charset="-120"/>
-              </a:rPr>
-              <a:t>知</a:t>
-            </a:r>
-            <a:r>
-              <a:rPr lang="zh-CN" altLang="en-US" sz="4000" b="1" dirty="0">
-                <a:solidFill>
-                  <a:srgbClr val="660033"/>
-                </a:solidFill>
-                <a:latin typeface="微軟正黑體" pitchFamily="34" charset="-120"/>
-                <a:ea typeface="微軟正黑體" pitchFamily="34" charset="-120"/>
-              </a:rPr>
-              <a:t>袮</a:t>
-            </a:r>
-            <a:r>
-              <a:rPr lang="zh-TW" altLang="en-US" sz="4000" b="1" dirty="0" smtClean="0">
-                <a:solidFill>
-                  <a:srgbClr val="660033"/>
-                </a:solidFill>
-                <a:latin typeface="微軟正黑體" pitchFamily="34" charset="-120"/>
-                <a:ea typeface="微軟正黑體" pitchFamily="34" charset="-120"/>
-              </a:rPr>
-              <a:t>的</a:t>
-            </a:r>
-            <a:r>
-              <a:rPr lang="zh-TW" altLang="en-US" sz="4000" b="1" dirty="0">
-                <a:solidFill>
-                  <a:srgbClr val="660033"/>
-                </a:solidFill>
-                <a:latin typeface="微軟正黑體" pitchFamily="34" charset="-120"/>
-                <a:ea typeface="微軟正黑體" pitchFamily="34" charset="-120"/>
-              </a:rPr>
-              <a:t>救恩</a:t>
-            </a:r>
-          </a:p>
-        </p:txBody>
-      </p:sp>
-      <p:sp>
-        <p:nvSpPr>
-          <p:cNvPr id="5" name="內容版面配置區 4"/>
-          <p:cNvSpPr>
-            <a:spLocks noGrp="1"/>
-          </p:cNvSpPr>
-          <p:nvPr>
-            <p:ph idx="1"/>
-          </p:nvPr>
-        </p:nvSpPr>
-        <p:spPr/>
-        <p:txBody>
-          <a:bodyPr>
-            <a:noAutofit/>
-          </a:bodyPr>
-          <a:lstStyle/>
-          <a:p>
-            <a:pPr algn="ctr">
-              <a:buNone/>
-            </a:pPr>
-            <a:r>
-              <a:rPr lang="zh-TW" altLang="en-US" sz="4800" b="1" dirty="0">
-                <a:solidFill>
-                  <a:srgbClr val="660033"/>
-                </a:solidFill>
-                <a:latin typeface="微軟正黑體" pitchFamily="34" charset="-120"/>
-                <a:ea typeface="微軟正黑體" pitchFamily="34" charset="-120"/>
-              </a:rPr>
-              <a:t>讓我們起來傳揚</a:t>
-            </a:r>
-            <a:endParaRPr lang="en-US" altLang="zh-TW" sz="4800" b="1" dirty="0">
+              <a:t>公義發出 儼如光輝</a:t>
+            </a:r>
+            <a:endParaRPr lang="en-US" altLang="zh-TW" sz="4950" b="1" dirty="0">
               <a:solidFill>
                 <a:srgbClr val="660033"/>
               </a:solidFill>
@@ -3724,173 +3313,102 @@
               <a:buNone/>
             </a:pPr>
             <a:r>
-              <a:rPr lang="zh-TW" altLang="en-US" sz="4800" b="1" dirty="0" smtClean="0">
+              <a:rPr lang="zh-CN" altLang="en-US" sz="4950" b="1" dirty="0">
                 <a:solidFill>
                   <a:srgbClr val="660033"/>
                 </a:solidFill>
                 <a:latin typeface="微軟正黑體" pitchFamily="34" charset="-120"/>
                 <a:ea typeface="微軟正黑體" pitchFamily="34" charset="-120"/>
               </a:rPr>
-              <a:t>傳</a:t>
-            </a:r>
-            <a:r>
-              <a:rPr lang="zh-CN" altLang="en-US" sz="4800" b="1" dirty="0">
+              <a:t>祢</a:t>
+            </a:r>
+            <a:r>
+              <a:rPr lang="zh-TW" altLang="en-US" sz="4950" b="1" dirty="0">
                 <a:solidFill>
                   <a:srgbClr val="660033"/>
                 </a:solidFill>
                 <a:latin typeface="微軟正黑體" pitchFamily="34" charset="-120"/>
                 <a:ea typeface="微軟正黑體" pitchFamily="34" charset="-120"/>
               </a:rPr>
-              <a:t>袮</a:t>
-            </a:r>
-            <a:r>
-              <a:rPr lang="zh-TW" altLang="en-US" sz="4800" b="1" dirty="0" smtClean="0">
-                <a:solidFill>
-                  <a:srgbClr val="660033"/>
-                </a:solidFill>
-                <a:latin typeface="微軟正黑體" pitchFamily="34" charset="-120"/>
-                <a:ea typeface="微軟正黑體" pitchFamily="34" charset="-120"/>
-              </a:rPr>
-              <a:t>聖</a:t>
-            </a:r>
-            <a:r>
-              <a:rPr lang="zh-TW" altLang="en-US" sz="4800" b="1" dirty="0">
-                <a:solidFill>
-                  <a:srgbClr val="660033"/>
-                </a:solidFill>
-                <a:latin typeface="微軟正黑體" pitchFamily="34" charset="-120"/>
-                <a:ea typeface="微軟正黑體" pitchFamily="34" charset="-120"/>
-              </a:rPr>
-              <a:t>名到萬邦</a:t>
-            </a:r>
-            <a:endParaRPr lang="en-US" altLang="zh-TW" sz="4800" b="1" dirty="0">
+              <a:t>的救恩如明燈閃亮</a:t>
+            </a:r>
+          </a:p>
+        </p:txBody>
+      </p:sp>
+      <p:sp>
+        <p:nvSpPr>
+          <p:cNvPr id="3" name="TextBox 2">
+            <a:extLst>
+              <a:ext uri="{FF2B5EF4-FFF2-40B4-BE49-F238E27FC236}">
+                <a16:creationId xmlns:a16="http://schemas.microsoft.com/office/drawing/2014/main" id="{063E5A48-3003-684C-6857-50833D936FDD}"/>
+              </a:ext>
+            </a:extLst>
+          </p:cNvPr>
+          <p:cNvSpPr txBox="1"/>
+          <p:nvPr/>
+        </p:nvSpPr>
+        <p:spPr>
+          <a:xfrm>
+            <a:off x="0" y="3867895"/>
+            <a:ext cx="9144000" cy="461665"/>
+          </a:xfrm>
+          <a:prstGeom prst="rect">
+            <a:avLst/>
+          </a:prstGeom>
+          <a:noFill/>
+        </p:spPr>
+        <p:txBody>
+          <a:bodyPr wrap="square" rtlCol="0">
+            <a:spAutoFit/>
+          </a:bodyPr>
+          <a:lstStyle/>
+          <a:p>
+            <a:pPr algn="ctr"/>
+            <a:r>
+              <a:rPr lang="en-US" sz="2400" b="1" dirty="0">
+                <a:solidFill>
+                  <a:srgbClr val="660033"/>
+                </a:solidFill>
+                <a:latin typeface="Microsoft JhengHei" panose="020B0604030504040204" pitchFamily="34" charset="-120"/>
+                <a:ea typeface="Microsoft JhengHei" panose="020B0604030504040204" pitchFamily="34" charset="-120"/>
+              </a:rPr>
+              <a:t>( </a:t>
+            </a:r>
+            <a:r>
+              <a:rPr lang="zh-CN" altLang="en-US" sz="2400" b="1" dirty="0">
+                <a:solidFill>
+                  <a:srgbClr val="660033"/>
+                </a:solidFill>
+                <a:latin typeface="Microsoft JhengHei" panose="020B0604030504040204" pitchFamily="34" charset="-120"/>
+                <a:ea typeface="Microsoft JhengHei" panose="020B0604030504040204" pitchFamily="34" charset="-120"/>
+              </a:rPr>
+              <a:t>正歌</a:t>
+            </a:r>
+            <a:r>
+              <a:rPr lang="en-US" sz="2400" b="1" dirty="0">
+                <a:solidFill>
+                  <a:srgbClr val="660033"/>
+                </a:solidFill>
+                <a:latin typeface="Microsoft JhengHei" panose="020B0604030504040204" pitchFamily="34" charset="-120"/>
+                <a:ea typeface="Microsoft JhengHei" panose="020B0604030504040204" pitchFamily="34" charset="-120"/>
+              </a:rPr>
+              <a:t> )</a:t>
+            </a:r>
+            <a:endParaRPr lang="vi-VN" sz="2400" b="1" dirty="0">
               <a:solidFill>
                 <a:srgbClr val="660033"/>
               </a:solidFill>
-              <a:latin typeface="微軟正黑體" pitchFamily="34" charset="-120"/>
-              <a:ea typeface="微軟正黑體" pitchFamily="34" charset="-120"/>
+              <a:ea typeface="Microsoft JhengHei" panose="020B0604030504040204" pitchFamily="34" charset="-120"/>
             </a:endParaRPr>
           </a:p>
-          <a:p>
-            <a:pPr algn="ctr">
-              <a:buNone/>
-            </a:pPr>
-            <a:r>
-              <a:rPr lang="zh-TW" altLang="en-US" sz="4800" b="1" dirty="0">
-                <a:solidFill>
-                  <a:srgbClr val="660033"/>
-                </a:solidFill>
-                <a:latin typeface="微軟正黑體" pitchFamily="34" charset="-120"/>
-                <a:ea typeface="微軟正黑體" pitchFamily="34" charset="-120"/>
-              </a:rPr>
-              <a:t>讓萬國得</a:t>
-            </a:r>
-            <a:r>
-              <a:rPr lang="zh-TW" altLang="en-US" sz="4800" b="1" dirty="0" smtClean="0">
-                <a:solidFill>
-                  <a:srgbClr val="660033"/>
-                </a:solidFill>
-                <a:latin typeface="微軟正黑體" pitchFamily="34" charset="-120"/>
-                <a:ea typeface="微軟正黑體" pitchFamily="34" charset="-120"/>
-              </a:rPr>
-              <a:t>知</a:t>
-            </a:r>
-            <a:r>
-              <a:rPr lang="zh-CN" altLang="en-US" sz="4800" b="1" dirty="0">
-                <a:solidFill>
-                  <a:srgbClr val="660033"/>
-                </a:solidFill>
-                <a:latin typeface="微軟正黑體" pitchFamily="34" charset="-120"/>
-                <a:ea typeface="微軟正黑體" pitchFamily="34" charset="-120"/>
-              </a:rPr>
-              <a:t>袮</a:t>
-            </a:r>
-            <a:r>
-              <a:rPr lang="zh-TW" altLang="en-US" sz="4800" b="1" dirty="0" smtClean="0">
-                <a:solidFill>
-                  <a:srgbClr val="660033"/>
-                </a:solidFill>
-                <a:latin typeface="微軟正黑體" pitchFamily="34" charset="-120"/>
-                <a:ea typeface="微軟正黑體" pitchFamily="34" charset="-120"/>
-              </a:rPr>
-              <a:t>的</a:t>
-            </a:r>
-            <a:r>
-              <a:rPr lang="zh-TW" altLang="en-US" sz="4800" b="1" dirty="0">
-                <a:solidFill>
-                  <a:srgbClr val="660033"/>
-                </a:solidFill>
-                <a:latin typeface="微軟正黑體" pitchFamily="34" charset="-120"/>
-                <a:ea typeface="微軟正黑體" pitchFamily="34" charset="-120"/>
-              </a:rPr>
-              <a:t>救恩 </a:t>
-            </a:r>
-            <a:endParaRPr lang="en-US" altLang="zh-TW" sz="4800" b="1" dirty="0">
-              <a:solidFill>
-                <a:srgbClr val="660033"/>
-              </a:solidFill>
-              <a:latin typeface="微軟正黑體" pitchFamily="34" charset="-120"/>
-              <a:ea typeface="微軟正黑體" pitchFamily="34" charset="-120"/>
-            </a:endParaRPr>
-          </a:p>
-          <a:p>
-            <a:pPr algn="ctr">
-              <a:buNone/>
-            </a:pPr>
-            <a:r>
-              <a:rPr lang="zh-TW" altLang="en-US" sz="4800" b="1" dirty="0">
-                <a:solidFill>
-                  <a:srgbClr val="660033"/>
-                </a:solidFill>
-                <a:latin typeface="微軟正黑體" pitchFamily="34" charset="-120"/>
-                <a:ea typeface="微軟正黑體" pitchFamily="34" charset="-120"/>
-              </a:rPr>
-              <a:t>讓萬民揚聲</a:t>
-            </a:r>
-            <a:r>
-              <a:rPr lang="zh-TW" altLang="en-US" sz="4800" b="1" dirty="0" smtClean="0">
-                <a:solidFill>
-                  <a:srgbClr val="660033"/>
-                </a:solidFill>
-                <a:latin typeface="微軟正黑體" pitchFamily="34" charset="-120"/>
-                <a:ea typeface="微軟正黑體" pitchFamily="34" charset="-120"/>
-              </a:rPr>
-              <a:t>向</a:t>
-            </a:r>
-            <a:r>
-              <a:rPr lang="zh-CN" altLang="en-US" sz="4800" b="1" dirty="0">
-                <a:solidFill>
-                  <a:srgbClr val="660033"/>
-                </a:solidFill>
-                <a:latin typeface="微軟正黑體" pitchFamily="34" charset="-120"/>
-                <a:ea typeface="微軟正黑體" pitchFamily="34" charset="-120"/>
-              </a:rPr>
-              <a:t>袮</a:t>
-            </a:r>
-            <a:r>
-              <a:rPr lang="zh-TW" altLang="en-US" sz="4800" b="1" dirty="0" smtClean="0">
-                <a:solidFill>
-                  <a:srgbClr val="660033"/>
-                </a:solidFill>
-                <a:latin typeface="微軟正黑體" pitchFamily="34" charset="-120"/>
-                <a:ea typeface="微軟正黑體" pitchFamily="34" charset="-120"/>
-              </a:rPr>
-              <a:t>歌</a:t>
-            </a:r>
-            <a:r>
-              <a:rPr lang="zh-TW" altLang="en-US" sz="4800" b="1" dirty="0">
-                <a:solidFill>
-                  <a:srgbClr val="660033"/>
-                </a:solidFill>
-                <a:latin typeface="微軟正黑體" pitchFamily="34" charset="-120"/>
-                <a:ea typeface="微軟正黑體" pitchFamily="34" charset="-120"/>
-              </a:rPr>
-              <a:t>唱</a:t>
-            </a:r>
-          </a:p>
         </p:txBody>
       </p:sp>
     </p:spTree>
+    <p:extLst>
+      <p:ext uri="{BB962C8B-B14F-4D97-AF65-F5344CB8AC3E}">
+        <p14:creationId xmlns:p14="http://schemas.microsoft.com/office/powerpoint/2010/main" val="328639150"/>
+      </p:ext>
+    </p:extLst>
   </p:cSld>
   <p:clrMapOvr>
     <a:masterClrMapping/>
@@ -3903,7 +3421,13 @@
   <p:cSld>
     <p:spTree>
       <p:nvGrpSpPr>
-        <p:cNvPr id="1" name=""/>
+        <p:cNvPr id="1" name="">
+          <a:extLst>
+            <a:ext uri="{FF2B5EF4-FFF2-40B4-BE49-F238E27FC236}">
+              <a16:creationId xmlns:a16="http://schemas.microsoft.com/office/drawing/2014/main" id="{1A4E2EB9-9D18-F2E9-B56D-A5852B6BFE0E}"/>
+            </a:ext>
+          </a:extLst>
+        </p:cNvPr>
         <p:cNvGrpSpPr/>
         <p:nvPr/>
       </p:nvGrpSpPr>
@@ -3917,105 +3441,56 @@
       </p:grpSpPr>
       <p:sp>
         <p:nvSpPr>
-          <p:cNvPr id="4" name="標題 3"/>
-          <p:cNvSpPr>
-            <a:spLocks noGrp="1"/>
-          </p:cNvSpPr>
-          <p:nvPr>
-            <p:ph type="title"/>
-          </p:nvPr>
-        </p:nvSpPr>
-        <p:spPr/>
-        <p:txBody>
-          <a:bodyPr>
+          <p:cNvPr id="5" name="內容版面配置區 4">
+            <a:extLst>
+              <a:ext uri="{FF2B5EF4-FFF2-40B4-BE49-F238E27FC236}">
+                <a16:creationId xmlns:a16="http://schemas.microsoft.com/office/drawing/2014/main" id="{7A972CAB-0513-E793-04CC-F2768020456A}"/>
+              </a:ext>
+            </a:extLst>
+          </p:cNvPr>
+          <p:cNvSpPr>
+            <a:spLocks noGrp="1"/>
+          </p:cNvSpPr>
+          <p:nvPr>
+            <p:ph idx="1"/>
+          </p:nvPr>
+        </p:nvSpPr>
+        <p:spPr>
+          <a:xfrm>
+            <a:off x="0" y="1563639"/>
+            <a:ext cx="9144000" cy="1803647"/>
+          </a:xfrm>
+        </p:spPr>
+        <p:txBody>
+          <a:bodyPr anchor="ctr">
             <a:normAutofit/>
           </a:bodyPr>
           <a:lstStyle/>
           <a:p>
-            <a:r>
-              <a:rPr lang="zh-TW" altLang="en-US" sz="4000" b="1" dirty="0">
+            <a:pPr algn="ctr">
+              <a:buNone/>
+            </a:pPr>
+            <a:r>
+              <a:rPr lang="zh-CN" altLang="en-US" sz="4950" b="1" dirty="0">
                 <a:solidFill>
                   <a:srgbClr val="660033"/>
                 </a:solidFill>
                 <a:latin typeface="微軟正黑體" pitchFamily="34" charset="-120"/>
                 <a:ea typeface="微軟正黑體" pitchFamily="34" charset="-120"/>
               </a:rPr>
-              <a:t>萬國得</a:t>
-            </a:r>
-            <a:r>
-              <a:rPr lang="zh-TW" altLang="en-US" sz="4000" b="1" dirty="0" smtClean="0">
+              <a:t>祢</a:t>
+            </a:r>
+            <a:r>
+              <a:rPr lang="zh-TW" altLang="en-US" sz="4950" b="1" dirty="0">
                 <a:solidFill>
                   <a:srgbClr val="660033"/>
                 </a:solidFill>
                 <a:latin typeface="微軟正黑體" pitchFamily="34" charset="-120"/>
                 <a:ea typeface="微軟正黑體" pitchFamily="34" charset="-120"/>
               </a:rPr>
-              <a:t>知</a:t>
-            </a:r>
-            <a:r>
-              <a:rPr lang="zh-CN" altLang="en-US" sz="4000" b="1" dirty="0">
-                <a:solidFill>
-                  <a:srgbClr val="660033"/>
-                </a:solidFill>
-                <a:latin typeface="微軟正黑體" pitchFamily="34" charset="-120"/>
-                <a:ea typeface="微軟正黑體" pitchFamily="34" charset="-120"/>
-              </a:rPr>
-              <a:t>袮</a:t>
-            </a:r>
-            <a:r>
-              <a:rPr lang="zh-TW" altLang="en-US" sz="4000" b="1" dirty="0" smtClean="0">
-                <a:solidFill>
-                  <a:srgbClr val="660033"/>
-                </a:solidFill>
-                <a:latin typeface="微軟正黑體" pitchFamily="34" charset="-120"/>
-                <a:ea typeface="微軟正黑體" pitchFamily="34" charset="-120"/>
-              </a:rPr>
-              <a:t>的</a:t>
-            </a:r>
-            <a:r>
-              <a:rPr lang="zh-TW" altLang="en-US" sz="4000" b="1" dirty="0">
-                <a:solidFill>
-                  <a:srgbClr val="660033"/>
-                </a:solidFill>
-                <a:latin typeface="微軟正黑體" pitchFamily="34" charset="-120"/>
-                <a:ea typeface="微軟正黑體" pitchFamily="34" charset="-120"/>
-              </a:rPr>
-              <a:t>救恩</a:t>
-            </a:r>
-          </a:p>
-        </p:txBody>
-      </p:sp>
-      <p:sp>
-        <p:nvSpPr>
-          <p:cNvPr id="5" name="內容版面配置區 4"/>
-          <p:cNvSpPr>
-            <a:spLocks noGrp="1"/>
-          </p:cNvSpPr>
-          <p:nvPr>
-            <p:ph idx="1"/>
-          </p:nvPr>
-        </p:nvSpPr>
-        <p:spPr/>
-        <p:txBody>
-          <a:bodyPr>
-            <a:noAutofit/>
-          </a:bodyPr>
-          <a:lstStyle/>
-          <a:p>
-            <a:pPr algn="ctr">
-              <a:buNone/>
-            </a:pPr>
-            <a:r>
-              <a:rPr lang="zh-TW" altLang="en-US" sz="4800" b="1" dirty="0">
-                <a:solidFill>
-                  <a:srgbClr val="660033"/>
-                </a:solidFill>
-                <a:latin typeface="微軟正黑體" pitchFamily="34" charset="-120"/>
-                <a:ea typeface="微軟正黑體" pitchFamily="34" charset="-120"/>
-              </a:rPr>
-              <a:t>讓我們起來傳揚</a:t>
-            </a:r>
-            <a:endParaRPr lang="en-US" altLang="zh-TW" sz="4800" b="1" dirty="0">
+              <a:t>的臂膀  大有能力</a:t>
+            </a:r>
+            <a:endParaRPr lang="en-US" altLang="zh-TW" sz="4950" b="1" dirty="0">
               <a:solidFill>
                 <a:srgbClr val="660033"/>
               </a:solidFill>
@@ -4028,46 +3503,26 @@
               <a:buNone/>
             </a:pPr>
             <a:r>
-              <a:rPr lang="zh-TW" altLang="en-US" sz="4800" b="1" dirty="0" smtClean="0">
+              <a:rPr lang="zh-CN" altLang="en-US" sz="4950" b="1" dirty="0">
                 <a:solidFill>
                   <a:srgbClr val="660033"/>
                 </a:solidFill>
                 <a:latin typeface="微軟正黑體" pitchFamily="34" charset="-120"/>
                 <a:ea typeface="微軟正黑體" pitchFamily="34" charset="-120"/>
               </a:rPr>
-              <a:t>傳</a:t>
-            </a:r>
-            <a:r>
-              <a:rPr lang="zh-CN" altLang="en-US" sz="4800" b="1" dirty="0">
+              <a:t>祢</a:t>
+            </a:r>
+            <a:r>
+              <a:rPr lang="zh-TW" altLang="en-US" sz="4950" b="1" dirty="0">
                 <a:solidFill>
                   <a:srgbClr val="660033"/>
                 </a:solidFill>
                 <a:latin typeface="微軟正黑體" pitchFamily="34" charset="-120"/>
                 <a:ea typeface="微軟正黑體" pitchFamily="34" charset="-120"/>
               </a:rPr>
-              <a:t>袮</a:t>
-            </a:r>
-            <a:r>
-              <a:rPr lang="zh-TW" altLang="en-US" sz="4800" b="1" dirty="0" smtClean="0">
-                <a:solidFill>
-                  <a:srgbClr val="660033"/>
-                </a:solidFill>
-                <a:latin typeface="微軟正黑體" pitchFamily="34" charset="-120"/>
-                <a:ea typeface="微軟正黑體" pitchFamily="34" charset="-120"/>
-              </a:rPr>
-              <a:t>聖</a:t>
-            </a:r>
-            <a:r>
-              <a:rPr lang="zh-TW" altLang="en-US" sz="4800" b="1" dirty="0">
-                <a:solidFill>
-                  <a:srgbClr val="660033"/>
-                </a:solidFill>
-                <a:latin typeface="微軟正黑體" pitchFamily="34" charset="-120"/>
-                <a:ea typeface="微軟正黑體" pitchFamily="34" charset="-120"/>
-              </a:rPr>
-              <a:t>名到萬邦</a:t>
-            </a:r>
-            <a:endParaRPr lang="en-US" altLang="zh-TW" sz="4800" b="1" dirty="0">
+              <a:t>殿宇高大輝煌</a:t>
+            </a:r>
+            <a:endParaRPr lang="en-US" altLang="zh-TW" sz="4950" b="1" dirty="0">
               <a:solidFill>
                 <a:srgbClr val="660033"/>
               </a:solidFill>
@@ -4075,61 +3530,154 @@
               <a:ea typeface="微軟正黑體" pitchFamily="34" charset="-120"/>
             </a:endParaRPr>
           </a:p>
+        </p:txBody>
+      </p:sp>
+      <p:sp>
+        <p:nvSpPr>
+          <p:cNvPr id="3" name="TextBox 2">
+            <a:extLst>
+              <a:ext uri="{FF2B5EF4-FFF2-40B4-BE49-F238E27FC236}">
+                <a16:creationId xmlns:a16="http://schemas.microsoft.com/office/drawing/2014/main" id="{2201C800-543B-AC2C-ED4F-22AAF127613C}"/>
+              </a:ext>
+            </a:extLst>
+          </p:cNvPr>
+          <p:cNvSpPr txBox="1"/>
+          <p:nvPr/>
+        </p:nvSpPr>
+        <p:spPr>
+          <a:xfrm>
+            <a:off x="0" y="3867895"/>
+            <a:ext cx="9144000" cy="461665"/>
+          </a:xfrm>
+          <a:prstGeom prst="rect">
+            <a:avLst/>
+          </a:prstGeom>
+          <a:noFill/>
+        </p:spPr>
+        <p:txBody>
+          <a:bodyPr wrap="square" rtlCol="0">
+            <a:spAutoFit/>
+          </a:bodyPr>
+          <a:lstStyle/>
+          <a:p>
+            <a:pPr algn="ctr"/>
+            <a:r>
+              <a:rPr lang="en-US" sz="2400" b="1" dirty="0">
+                <a:solidFill>
+                  <a:srgbClr val="660033"/>
+                </a:solidFill>
+                <a:latin typeface="Microsoft JhengHei" panose="020B0604030504040204" pitchFamily="34" charset="-120"/>
+                <a:ea typeface="Microsoft JhengHei" panose="020B0604030504040204" pitchFamily="34" charset="-120"/>
+              </a:rPr>
+              <a:t>( </a:t>
+            </a:r>
+            <a:r>
+              <a:rPr lang="zh-CN" altLang="en-US" sz="2400" b="1" dirty="0">
+                <a:solidFill>
+                  <a:srgbClr val="660033"/>
+                </a:solidFill>
+                <a:latin typeface="Microsoft JhengHei" panose="020B0604030504040204" pitchFamily="34" charset="-120"/>
+                <a:ea typeface="Microsoft JhengHei" panose="020B0604030504040204" pitchFamily="34" charset="-120"/>
+              </a:rPr>
+              <a:t>正歌</a:t>
+            </a:r>
+            <a:r>
+              <a:rPr lang="en-US" sz="2400" b="1" dirty="0">
+                <a:solidFill>
+                  <a:srgbClr val="660033"/>
+                </a:solidFill>
+                <a:latin typeface="Microsoft JhengHei" panose="020B0604030504040204" pitchFamily="34" charset="-120"/>
+                <a:ea typeface="Microsoft JhengHei" panose="020B0604030504040204" pitchFamily="34" charset="-120"/>
+              </a:rPr>
+              <a:t> )</a:t>
+            </a:r>
+            <a:endParaRPr lang="vi-VN" sz="2400" b="1" dirty="0">
+              <a:solidFill>
+                <a:srgbClr val="660033"/>
+              </a:solidFill>
+              <a:ea typeface="Microsoft JhengHei" panose="020B0604030504040204" pitchFamily="34" charset="-120"/>
+            </a:endParaRPr>
+          </a:p>
+        </p:txBody>
+      </p:sp>
+    </p:spTree>
+    <p:extLst>
+      <p:ext uri="{BB962C8B-B14F-4D97-AF65-F5344CB8AC3E}">
+        <p14:creationId xmlns:p14="http://schemas.microsoft.com/office/powerpoint/2010/main" val="1118464431"/>
+      </p:ext>
+    </p:extLst>
+  </p:cSld>
+  <p:clrMapOvr>
+    <a:masterClrMapping/>
+  </p:clrMapOvr>
+</p:sld>
+</file>
+
+<file path=ppt/slides/slide5.xml><?xml version="1.0" encoding="utf-8"?>
+<p:sld xmlns:a="http://schemas.openxmlformats.org/drawingml/2006/main" xmlns:r="http://schemas.openxmlformats.org/officeDocument/2006/relationships" xmlns:p="http://schemas.openxmlformats.org/presentationml/2006/main">
+  <p:cSld>
+    <p:spTree>
+      <p:nvGrpSpPr>
+        <p:cNvPr id="1" name="">
+          <a:extLst>
+            <a:ext uri="{FF2B5EF4-FFF2-40B4-BE49-F238E27FC236}">
+              <a16:creationId xmlns:a16="http://schemas.microsoft.com/office/drawing/2014/main" id="{349B33A8-89CF-7293-5257-461334F08683}"/>
+            </a:ext>
+          </a:extLst>
+        </p:cNvPr>
+        <p:cNvGrpSpPr/>
+        <p:nvPr/>
+      </p:nvGrpSpPr>
+      <p:grpSpPr>
+        <a:xfrm>
+          <a:off x="0" y="0"/>
+          <a:ext cx="0" cy="0"/>
+          <a:chOff x="0" y="0"/>
+          <a:chExt cx="0" cy="0"/>
+        </a:xfrm>
+      </p:grpSpPr>
+      <p:sp>
+        <p:nvSpPr>
+          <p:cNvPr id="5" name="內容版面配置區 4">
+            <a:extLst>
+              <a:ext uri="{FF2B5EF4-FFF2-40B4-BE49-F238E27FC236}">
+                <a16:creationId xmlns:a16="http://schemas.microsoft.com/office/drawing/2014/main" id="{CA1AB184-B97F-295A-1424-24595A8D048E}"/>
+              </a:ext>
+            </a:extLst>
+          </p:cNvPr>
+          <p:cNvSpPr>
+            <a:spLocks noGrp="1"/>
+          </p:cNvSpPr>
+          <p:nvPr>
+            <p:ph idx="1"/>
+          </p:nvPr>
+        </p:nvSpPr>
+        <p:spPr>
+          <a:xfrm>
+            <a:off x="0" y="1563639"/>
+            <a:ext cx="9144000" cy="1803647"/>
+          </a:xfrm>
+        </p:spPr>
+        <p:txBody>
+          <a:bodyPr anchor="ctr">
+            <a:normAutofit/>
+          </a:bodyPr>
+          <a:lstStyle/>
           <a:p>
             <a:pPr algn="ctr">
               <a:buNone/>
             </a:pPr>
             <a:r>
-              <a:rPr lang="zh-TW" altLang="en-US" sz="4800" b="1" dirty="0">
+              <a:rPr lang="zh-TW" altLang="en-US" sz="4950" b="1" dirty="0">
                 <a:solidFill>
                   <a:srgbClr val="660033"/>
                 </a:solidFill>
                 <a:latin typeface="微軟正黑體" pitchFamily="34" charset="-120"/>
                 <a:ea typeface="微軟正黑體" pitchFamily="34" charset="-120"/>
               </a:rPr>
-              <a:t>讓世界得</a:t>
-            </a:r>
-            <a:r>
-              <a:rPr lang="zh-TW" altLang="en-US" sz="4800" b="1" dirty="0" smtClean="0">
-                <a:solidFill>
-                  <a:srgbClr val="660033"/>
-                </a:solidFill>
-                <a:latin typeface="微軟正黑體" pitchFamily="34" charset="-120"/>
-                <a:ea typeface="微軟正黑體" pitchFamily="34" charset="-120"/>
-              </a:rPr>
-              <a:t>知</a:t>
-            </a:r>
-            <a:r>
-              <a:rPr lang="zh-CN" altLang="en-US" sz="4800" b="1" dirty="0">
-                <a:solidFill>
-                  <a:srgbClr val="660033"/>
-                </a:solidFill>
-                <a:latin typeface="微軟正黑體" pitchFamily="34" charset="-120"/>
-                <a:ea typeface="微軟正黑體" pitchFamily="34" charset="-120"/>
-              </a:rPr>
-              <a:t>袮</a:t>
-            </a:r>
-            <a:r>
-              <a:rPr lang="zh-TW" altLang="en-US" sz="4800" b="1" dirty="0" smtClean="0">
-                <a:solidFill>
-                  <a:srgbClr val="660033"/>
-                </a:solidFill>
-                <a:latin typeface="微軟正黑體" pitchFamily="34" charset="-120"/>
-                <a:ea typeface="微軟正黑體" pitchFamily="34" charset="-120"/>
-              </a:rPr>
-              <a:t>的</a:t>
-            </a:r>
-            <a:r>
-              <a:rPr lang="zh-TW" altLang="en-US" sz="4800" b="1" dirty="0">
-                <a:solidFill>
-                  <a:srgbClr val="660033"/>
-                </a:solidFill>
-                <a:latin typeface="微軟正黑體" pitchFamily="34" charset="-120"/>
-                <a:ea typeface="微軟正黑體" pitchFamily="34" charset="-120"/>
-              </a:rPr>
-              <a:t>道路</a:t>
-            </a:r>
-            <a:endParaRPr lang="en-US" altLang="zh-TW" sz="4800" b="1" dirty="0">
+              <a:t>普天之下  萬國的神</a:t>
+            </a:r>
+            <a:endParaRPr lang="en-US" altLang="zh-TW" sz="4950" b="1" dirty="0">
               <a:solidFill>
                 <a:srgbClr val="660033"/>
               </a:solidFill>
@@ -4142,59 +3690,916 @@
               <a:buNone/>
             </a:pPr>
             <a:r>
-              <a:rPr lang="zh-TW" altLang="en-US" sz="4800" b="1" dirty="0">
+              <a:rPr lang="zh-CN" altLang="en-US" sz="4950" b="1" dirty="0">
                 <a:solidFill>
                   <a:srgbClr val="660033"/>
                 </a:solidFill>
                 <a:latin typeface="微軟正黑體" pitchFamily="34" charset="-120"/>
                 <a:ea typeface="微軟正黑體" pitchFamily="34" charset="-120"/>
               </a:rPr>
-              <a:t>讓</a:t>
-            </a:r>
-            <a:r>
-              <a:rPr lang="zh-TW" altLang="en-US" sz="4800" b="1" dirty="0" smtClean="0">
+              <a:t>祢</a:t>
+            </a:r>
+            <a:r>
+              <a:rPr lang="zh-TW" altLang="en-US" sz="4950" b="1" dirty="0">
                 <a:solidFill>
                   <a:srgbClr val="660033"/>
                 </a:solidFill>
                 <a:latin typeface="微軟正黑體" pitchFamily="34" charset="-120"/>
                 <a:ea typeface="微軟正黑體" pitchFamily="34" charset="-120"/>
               </a:rPr>
-              <a:t>主</a:t>
-            </a:r>
-            <a:r>
-              <a:rPr lang="zh-CN" altLang="en-US" sz="4800" b="1" dirty="0">
+              <a:t>慈愛充滿全地之上</a:t>
+            </a:r>
+          </a:p>
+        </p:txBody>
+      </p:sp>
+      <p:sp>
+        <p:nvSpPr>
+          <p:cNvPr id="3" name="TextBox 2">
+            <a:extLst>
+              <a:ext uri="{FF2B5EF4-FFF2-40B4-BE49-F238E27FC236}">
+                <a16:creationId xmlns:a16="http://schemas.microsoft.com/office/drawing/2014/main" id="{B193F0AB-5D79-FC34-81ED-F18F0B184876}"/>
+              </a:ext>
+            </a:extLst>
+          </p:cNvPr>
+          <p:cNvSpPr txBox="1"/>
+          <p:nvPr/>
+        </p:nvSpPr>
+        <p:spPr>
+          <a:xfrm>
+            <a:off x="0" y="3867895"/>
+            <a:ext cx="9144000" cy="461665"/>
+          </a:xfrm>
+          <a:prstGeom prst="rect">
+            <a:avLst/>
+          </a:prstGeom>
+          <a:noFill/>
+        </p:spPr>
+        <p:txBody>
+          <a:bodyPr wrap="square" rtlCol="0">
+            <a:spAutoFit/>
+          </a:bodyPr>
+          <a:lstStyle/>
+          <a:p>
+            <a:pPr algn="ctr"/>
+            <a:r>
+              <a:rPr lang="en-US" sz="2400" b="1" dirty="0">
+                <a:solidFill>
+                  <a:srgbClr val="660033"/>
+                </a:solidFill>
+                <a:latin typeface="Microsoft JhengHei" panose="020B0604030504040204" pitchFamily="34" charset="-120"/>
+                <a:ea typeface="Microsoft JhengHei" panose="020B0604030504040204" pitchFamily="34" charset="-120"/>
+              </a:rPr>
+              <a:t>( </a:t>
+            </a:r>
+            <a:r>
+              <a:rPr lang="zh-CN" altLang="en-US" sz="2400" b="1" dirty="0">
+                <a:solidFill>
+                  <a:srgbClr val="660033"/>
+                </a:solidFill>
+                <a:latin typeface="Microsoft JhengHei" panose="020B0604030504040204" pitchFamily="34" charset="-120"/>
+                <a:ea typeface="Microsoft JhengHei" panose="020B0604030504040204" pitchFamily="34" charset="-120"/>
+              </a:rPr>
+              <a:t>正歌</a:t>
+            </a:r>
+            <a:r>
+              <a:rPr lang="en-US" sz="2400" b="1" dirty="0">
+                <a:solidFill>
+                  <a:srgbClr val="660033"/>
+                </a:solidFill>
+                <a:latin typeface="Microsoft JhengHei" panose="020B0604030504040204" pitchFamily="34" charset="-120"/>
+                <a:ea typeface="Microsoft JhengHei" panose="020B0604030504040204" pitchFamily="34" charset="-120"/>
+              </a:rPr>
+              <a:t> )</a:t>
+            </a:r>
+            <a:endParaRPr lang="vi-VN" sz="2400" b="1" dirty="0">
+              <a:solidFill>
+                <a:srgbClr val="660033"/>
+              </a:solidFill>
+              <a:ea typeface="Microsoft JhengHei" panose="020B0604030504040204" pitchFamily="34" charset="-120"/>
+            </a:endParaRPr>
+          </a:p>
+        </p:txBody>
+      </p:sp>
+    </p:spTree>
+    <p:extLst>
+      <p:ext uri="{BB962C8B-B14F-4D97-AF65-F5344CB8AC3E}">
+        <p14:creationId xmlns:p14="http://schemas.microsoft.com/office/powerpoint/2010/main" val="312245983"/>
+      </p:ext>
+    </p:extLst>
+  </p:cSld>
+  <p:clrMapOvr>
+    <a:masterClrMapping/>
+  </p:clrMapOvr>
+</p:sld>
+</file>
+
+<file path=ppt/slides/slide6.xml><?xml version="1.0" encoding="utf-8"?>
+<p:sld xmlns:a="http://schemas.openxmlformats.org/drawingml/2006/main" xmlns:r="http://schemas.openxmlformats.org/officeDocument/2006/relationships" xmlns:p="http://schemas.openxmlformats.org/presentationml/2006/main">
+  <p:cSld>
+    <p:spTree>
+      <p:nvGrpSpPr>
+        <p:cNvPr id="1" name="">
+          <a:extLst>
+            <a:ext uri="{FF2B5EF4-FFF2-40B4-BE49-F238E27FC236}">
+              <a16:creationId xmlns:a16="http://schemas.microsoft.com/office/drawing/2014/main" id="{87A26ECB-6F76-2A62-28CE-A656F696AD25}"/>
+            </a:ext>
+          </a:extLst>
+        </p:cNvPr>
+        <p:cNvGrpSpPr/>
+        <p:nvPr/>
+      </p:nvGrpSpPr>
+      <p:grpSpPr>
+        <a:xfrm>
+          <a:off x="0" y="0"/>
+          <a:ext cx="0" cy="0"/>
+          <a:chOff x="0" y="0"/>
+          <a:chExt cx="0" cy="0"/>
+        </a:xfrm>
+      </p:grpSpPr>
+      <p:sp>
+        <p:nvSpPr>
+          <p:cNvPr id="5" name="內容版面配置區 4">
+            <a:extLst>
+              <a:ext uri="{FF2B5EF4-FFF2-40B4-BE49-F238E27FC236}">
+                <a16:creationId xmlns:a16="http://schemas.microsoft.com/office/drawing/2014/main" id="{D283FD3F-4B1A-D67C-DAD1-64FAF7788A7C}"/>
+              </a:ext>
+            </a:extLst>
+          </p:cNvPr>
+          <p:cNvSpPr>
+            <a:spLocks noGrp="1"/>
+          </p:cNvSpPr>
+          <p:nvPr>
+            <p:ph idx="1"/>
+          </p:nvPr>
+        </p:nvSpPr>
+        <p:spPr>
+          <a:xfrm>
+            <a:off x="0" y="1563639"/>
+            <a:ext cx="9144000" cy="1803647"/>
+          </a:xfrm>
+        </p:spPr>
+        <p:txBody>
+          <a:bodyPr anchor="ctr">
+            <a:normAutofit/>
+          </a:bodyPr>
+          <a:lstStyle/>
+          <a:p>
+            <a:pPr algn="ctr">
+              <a:buNone/>
+            </a:pPr>
+            <a:r>
+              <a:rPr lang="zh-TW" altLang="en-US" sz="4950" b="1" dirty="0">
                 <a:solidFill>
                   <a:srgbClr val="660033"/>
                 </a:solidFill>
                 <a:latin typeface="微軟正黑體" pitchFamily="34" charset="-120"/>
                 <a:ea typeface="微軟正黑體" pitchFamily="34" charset="-120"/>
               </a:rPr>
-              <a:t>袮</a:t>
-            </a:r>
-            <a:r>
-              <a:rPr lang="zh-TW" altLang="en-US" sz="4800" b="1" dirty="0" smtClean="0">
+              <a:t>讓我們起來傳揚</a:t>
+            </a:r>
+            <a:endParaRPr lang="en-US" altLang="zh-TW" sz="4950" b="1" dirty="0">
+              <a:solidFill>
+                <a:srgbClr val="660033"/>
+              </a:solidFill>
+              <a:latin typeface="微軟正黑體" pitchFamily="34" charset="-120"/>
+              <a:ea typeface="微軟正黑體" pitchFamily="34" charset="-120"/>
+            </a:endParaRPr>
+          </a:p>
+          <a:p>
+            <a:pPr algn="ctr">
+              <a:buNone/>
+            </a:pPr>
+            <a:r>
+              <a:rPr lang="zh-TW" altLang="en-US" sz="4950" b="1" dirty="0">
                 <a:solidFill>
                   <a:srgbClr val="660033"/>
                 </a:solidFill>
                 <a:latin typeface="微軟正黑體" pitchFamily="34" charset="-120"/>
                 <a:ea typeface="微軟正黑體" pitchFamily="34" charset="-120"/>
               </a:rPr>
-              <a:t>榮</a:t>
-            </a:r>
-            <a:r>
-              <a:rPr lang="zh-TW" altLang="en-US" sz="4800" b="1" dirty="0">
+              <a:t>傳</a:t>
+            </a:r>
+            <a:r>
+              <a:rPr lang="zh-CN" altLang="en-US" sz="4950" b="1" dirty="0">
                 <a:solidFill>
                   <a:srgbClr val="660033"/>
                 </a:solidFill>
                 <a:latin typeface="微軟正黑體" pitchFamily="34" charset="-120"/>
                 <a:ea typeface="微軟正黑體" pitchFamily="34" charset="-120"/>
               </a:rPr>
-              <a:t>耀照亮四方﻿</a:t>
-            </a:r>
+              <a:t>祢</a:t>
+            </a:r>
+            <a:r>
+              <a:rPr lang="zh-TW" altLang="en-US" sz="4950" b="1" dirty="0">
+                <a:solidFill>
+                  <a:srgbClr val="660033"/>
+                </a:solidFill>
+                <a:latin typeface="微軟正黑體" pitchFamily="34" charset="-120"/>
+                <a:ea typeface="微軟正黑體" pitchFamily="34" charset="-120"/>
+              </a:rPr>
+              <a:t>聖名到萬邦</a:t>
+            </a:r>
+            <a:endParaRPr lang="en-US" altLang="zh-TW" sz="4950" b="1" dirty="0">
+              <a:solidFill>
+                <a:srgbClr val="660033"/>
+              </a:solidFill>
+              <a:latin typeface="微軟正黑體" pitchFamily="34" charset="-120"/>
+              <a:ea typeface="微軟正黑體" pitchFamily="34" charset="-120"/>
+            </a:endParaRPr>
+          </a:p>
+        </p:txBody>
+      </p:sp>
+      <p:sp>
+        <p:nvSpPr>
+          <p:cNvPr id="3" name="TextBox 2">
+            <a:extLst>
+              <a:ext uri="{FF2B5EF4-FFF2-40B4-BE49-F238E27FC236}">
+                <a16:creationId xmlns:a16="http://schemas.microsoft.com/office/drawing/2014/main" id="{DB7B03D4-EA00-6A58-4F0E-C884C027C7A9}"/>
+              </a:ext>
+            </a:extLst>
+          </p:cNvPr>
+          <p:cNvSpPr txBox="1"/>
+          <p:nvPr/>
+        </p:nvSpPr>
+        <p:spPr>
+          <a:xfrm>
+            <a:off x="0" y="3867895"/>
+            <a:ext cx="9144000" cy="461665"/>
+          </a:xfrm>
+          <a:prstGeom prst="rect">
+            <a:avLst/>
+          </a:prstGeom>
+          <a:noFill/>
+        </p:spPr>
+        <p:txBody>
+          <a:bodyPr wrap="square" rtlCol="0">
+            <a:spAutoFit/>
+          </a:bodyPr>
+          <a:lstStyle/>
+          <a:p>
+            <a:pPr algn="ctr"/>
+            <a:r>
+              <a:rPr lang="en-US" sz="2400" b="1" dirty="0">
+                <a:solidFill>
+                  <a:srgbClr val="660033"/>
+                </a:solidFill>
+                <a:latin typeface="Microsoft JhengHei" panose="020B0604030504040204" pitchFamily="34" charset="-120"/>
+                <a:ea typeface="Microsoft JhengHei" panose="020B0604030504040204" pitchFamily="34" charset="-120"/>
+              </a:rPr>
+              <a:t>( </a:t>
+            </a:r>
+            <a:r>
+              <a:rPr lang="zh-CN" altLang="en-US" sz="2400" b="1" dirty="0">
+                <a:solidFill>
+                  <a:srgbClr val="660033"/>
+                </a:solidFill>
+                <a:latin typeface="Microsoft JhengHei" panose="020B0604030504040204" pitchFamily="34" charset="-120"/>
+                <a:ea typeface="Microsoft JhengHei" panose="020B0604030504040204" pitchFamily="34" charset="-120"/>
+              </a:rPr>
+              <a:t>副歌</a:t>
+            </a:r>
+            <a:r>
+              <a:rPr lang="en-US" sz="2400" b="1" dirty="0">
+                <a:solidFill>
+                  <a:srgbClr val="660033"/>
+                </a:solidFill>
+                <a:latin typeface="Microsoft JhengHei" panose="020B0604030504040204" pitchFamily="34" charset="-120"/>
+                <a:ea typeface="Microsoft JhengHei" panose="020B0604030504040204" pitchFamily="34" charset="-120"/>
+              </a:rPr>
+              <a:t> )</a:t>
+            </a:r>
+            <a:endParaRPr lang="vi-VN" sz="2400" b="1" dirty="0">
+              <a:solidFill>
+                <a:srgbClr val="660033"/>
+              </a:solidFill>
+              <a:ea typeface="Microsoft JhengHei" panose="020B0604030504040204" pitchFamily="34" charset="-120"/>
+            </a:endParaRPr>
           </a:p>
         </p:txBody>
       </p:sp>
     </p:spTree>
+    <p:extLst>
+      <p:ext uri="{BB962C8B-B14F-4D97-AF65-F5344CB8AC3E}">
+        <p14:creationId xmlns:p14="http://schemas.microsoft.com/office/powerpoint/2010/main" val="2354772241"/>
+      </p:ext>
+    </p:extLst>
+  </p:cSld>
+  <p:clrMapOvr>
+    <a:masterClrMapping/>
+  </p:clrMapOvr>
+</p:sld>
+</file>
+
+<file path=ppt/slides/slide7.xml><?xml version="1.0" encoding="utf-8"?>
+<p:sld xmlns:a="http://schemas.openxmlformats.org/drawingml/2006/main" xmlns:r="http://schemas.openxmlformats.org/officeDocument/2006/relationships" xmlns:p="http://schemas.openxmlformats.org/presentationml/2006/main">
+  <p:cSld>
+    <p:spTree>
+      <p:nvGrpSpPr>
+        <p:cNvPr id="1" name="">
+          <a:extLst>
+            <a:ext uri="{FF2B5EF4-FFF2-40B4-BE49-F238E27FC236}">
+              <a16:creationId xmlns:a16="http://schemas.microsoft.com/office/drawing/2014/main" id="{CD717864-7460-5499-E5B0-72C65E098C93}"/>
+            </a:ext>
+          </a:extLst>
+        </p:cNvPr>
+        <p:cNvGrpSpPr/>
+        <p:nvPr/>
+      </p:nvGrpSpPr>
+      <p:grpSpPr>
+        <a:xfrm>
+          <a:off x="0" y="0"/>
+          <a:ext cx="0" cy="0"/>
+          <a:chOff x="0" y="0"/>
+          <a:chExt cx="0" cy="0"/>
+        </a:xfrm>
+      </p:grpSpPr>
+      <p:sp>
+        <p:nvSpPr>
+          <p:cNvPr id="5" name="內容版面配置區 4">
+            <a:extLst>
+              <a:ext uri="{FF2B5EF4-FFF2-40B4-BE49-F238E27FC236}">
+                <a16:creationId xmlns:a16="http://schemas.microsoft.com/office/drawing/2014/main" id="{EE8160C7-183B-CAFB-1244-26738B627F6A}"/>
+              </a:ext>
+            </a:extLst>
+          </p:cNvPr>
+          <p:cNvSpPr>
+            <a:spLocks noGrp="1"/>
+          </p:cNvSpPr>
+          <p:nvPr>
+            <p:ph idx="1"/>
+          </p:nvPr>
+        </p:nvSpPr>
+        <p:spPr>
+          <a:xfrm>
+            <a:off x="0" y="1563639"/>
+            <a:ext cx="9144000" cy="1803647"/>
+          </a:xfrm>
+        </p:spPr>
+        <p:txBody>
+          <a:bodyPr anchor="ctr">
+            <a:normAutofit/>
+          </a:bodyPr>
+          <a:lstStyle/>
+          <a:p>
+            <a:pPr algn="ctr">
+              <a:buNone/>
+            </a:pPr>
+            <a:r>
+              <a:rPr lang="zh-TW" altLang="en-US" sz="4950" b="1" dirty="0">
+                <a:solidFill>
+                  <a:srgbClr val="660033"/>
+                </a:solidFill>
+                <a:latin typeface="微軟正黑體" pitchFamily="34" charset="-120"/>
+                <a:ea typeface="微軟正黑體" pitchFamily="34" charset="-120"/>
+              </a:rPr>
+              <a:t>讓萬國得知</a:t>
+            </a:r>
+            <a:r>
+              <a:rPr lang="zh-CN" altLang="en-US" sz="4950" b="1" dirty="0">
+                <a:solidFill>
+                  <a:srgbClr val="660033"/>
+                </a:solidFill>
+                <a:latin typeface="微軟正黑體" pitchFamily="34" charset="-120"/>
+                <a:ea typeface="微軟正黑體" pitchFamily="34" charset="-120"/>
+              </a:rPr>
+              <a:t>祢</a:t>
+            </a:r>
+            <a:r>
+              <a:rPr lang="zh-TW" altLang="en-US" sz="4950" b="1" dirty="0">
+                <a:solidFill>
+                  <a:srgbClr val="660033"/>
+                </a:solidFill>
+                <a:latin typeface="微軟正黑體" pitchFamily="34" charset="-120"/>
+                <a:ea typeface="微軟正黑體" pitchFamily="34" charset="-120"/>
+              </a:rPr>
+              <a:t>的救恩 </a:t>
+            </a:r>
+            <a:endParaRPr lang="en-US" altLang="zh-TW" sz="4950" b="1" dirty="0">
+              <a:solidFill>
+                <a:srgbClr val="660033"/>
+              </a:solidFill>
+              <a:latin typeface="微軟正黑體" pitchFamily="34" charset="-120"/>
+              <a:ea typeface="微軟正黑體" pitchFamily="34" charset="-120"/>
+            </a:endParaRPr>
+          </a:p>
+          <a:p>
+            <a:pPr algn="ctr">
+              <a:buNone/>
+            </a:pPr>
+            <a:r>
+              <a:rPr lang="zh-TW" altLang="en-US" sz="4950" b="1" dirty="0">
+                <a:solidFill>
+                  <a:srgbClr val="660033"/>
+                </a:solidFill>
+                <a:latin typeface="微軟正黑體" pitchFamily="34" charset="-120"/>
+                <a:ea typeface="微軟正黑體" pitchFamily="34" charset="-120"/>
+              </a:rPr>
+              <a:t>讓萬民揚聲向</a:t>
+            </a:r>
+            <a:r>
+              <a:rPr lang="zh-CN" altLang="en-US" sz="4950" b="1" dirty="0">
+                <a:solidFill>
+                  <a:srgbClr val="660033"/>
+                </a:solidFill>
+                <a:latin typeface="微軟正黑體" pitchFamily="34" charset="-120"/>
+                <a:ea typeface="微軟正黑體" pitchFamily="34" charset="-120"/>
+              </a:rPr>
+              <a:t>祢</a:t>
+            </a:r>
+            <a:r>
+              <a:rPr lang="zh-TW" altLang="en-US" sz="4950" b="1" dirty="0">
+                <a:solidFill>
+                  <a:srgbClr val="660033"/>
+                </a:solidFill>
+                <a:latin typeface="微軟正黑體" pitchFamily="34" charset="-120"/>
+                <a:ea typeface="微軟正黑體" pitchFamily="34" charset="-120"/>
+              </a:rPr>
+              <a:t>歌唱</a:t>
+            </a:r>
+          </a:p>
+        </p:txBody>
+      </p:sp>
+      <p:sp>
+        <p:nvSpPr>
+          <p:cNvPr id="3" name="TextBox 2">
+            <a:extLst>
+              <a:ext uri="{FF2B5EF4-FFF2-40B4-BE49-F238E27FC236}">
+                <a16:creationId xmlns:a16="http://schemas.microsoft.com/office/drawing/2014/main" id="{63C7970E-2C21-B1A8-DB86-0A32876FA54A}"/>
+              </a:ext>
+            </a:extLst>
+          </p:cNvPr>
+          <p:cNvSpPr txBox="1"/>
+          <p:nvPr/>
+        </p:nvSpPr>
+        <p:spPr>
+          <a:xfrm>
+            <a:off x="0" y="3867895"/>
+            <a:ext cx="9144000" cy="461665"/>
+          </a:xfrm>
+          <a:prstGeom prst="rect">
+            <a:avLst/>
+          </a:prstGeom>
+          <a:noFill/>
+        </p:spPr>
+        <p:txBody>
+          <a:bodyPr wrap="square" rtlCol="0">
+            <a:spAutoFit/>
+          </a:bodyPr>
+          <a:lstStyle/>
+          <a:p>
+            <a:pPr algn="ctr"/>
+            <a:r>
+              <a:rPr lang="en-US" sz="2400" b="1" dirty="0">
+                <a:solidFill>
+                  <a:srgbClr val="660033"/>
+                </a:solidFill>
+                <a:latin typeface="Microsoft JhengHei" panose="020B0604030504040204" pitchFamily="34" charset="-120"/>
+                <a:ea typeface="Microsoft JhengHei" panose="020B0604030504040204" pitchFamily="34" charset="-120"/>
+              </a:rPr>
+              <a:t>( </a:t>
+            </a:r>
+            <a:r>
+              <a:rPr lang="zh-CN" altLang="en-US" sz="2400" b="1" dirty="0">
+                <a:solidFill>
+                  <a:srgbClr val="660033"/>
+                </a:solidFill>
+                <a:latin typeface="Microsoft JhengHei" panose="020B0604030504040204" pitchFamily="34" charset="-120"/>
+                <a:ea typeface="Microsoft JhengHei" panose="020B0604030504040204" pitchFamily="34" charset="-120"/>
+              </a:rPr>
+              <a:t>副歌</a:t>
+            </a:r>
+            <a:r>
+              <a:rPr lang="en-US" sz="2400" b="1" dirty="0">
+                <a:solidFill>
+                  <a:srgbClr val="660033"/>
+                </a:solidFill>
+                <a:latin typeface="Microsoft JhengHei" panose="020B0604030504040204" pitchFamily="34" charset="-120"/>
+                <a:ea typeface="Microsoft JhengHei" panose="020B0604030504040204" pitchFamily="34" charset="-120"/>
+              </a:rPr>
+              <a:t> )</a:t>
+            </a:r>
+            <a:endParaRPr lang="vi-VN" sz="2400" b="1" dirty="0">
+              <a:solidFill>
+                <a:srgbClr val="660033"/>
+              </a:solidFill>
+              <a:ea typeface="Microsoft JhengHei" panose="020B0604030504040204" pitchFamily="34" charset="-120"/>
+            </a:endParaRPr>
+          </a:p>
+        </p:txBody>
+      </p:sp>
+    </p:spTree>
+    <p:extLst>
+      <p:ext uri="{BB962C8B-B14F-4D97-AF65-F5344CB8AC3E}">
+        <p14:creationId xmlns:p14="http://schemas.microsoft.com/office/powerpoint/2010/main" val="1810686528"/>
+      </p:ext>
+    </p:extLst>
+  </p:cSld>
+  <p:clrMapOvr>
+    <a:masterClrMapping/>
+  </p:clrMapOvr>
+</p:sld>
+</file>
+
+<file path=ppt/slides/slide8.xml><?xml version="1.0" encoding="utf-8"?>
+<p:sld xmlns:a="http://schemas.openxmlformats.org/drawingml/2006/main" xmlns:r="http://schemas.openxmlformats.org/officeDocument/2006/relationships" xmlns:p="http://schemas.openxmlformats.org/presentationml/2006/main">
+  <p:cSld>
+    <p:spTree>
+      <p:nvGrpSpPr>
+        <p:cNvPr id="1" name="">
+          <a:extLst>
+            <a:ext uri="{FF2B5EF4-FFF2-40B4-BE49-F238E27FC236}">
+              <a16:creationId xmlns:a16="http://schemas.microsoft.com/office/drawing/2014/main" id="{907EB889-11D3-30FD-55BA-3EE7E8B5D295}"/>
+            </a:ext>
+          </a:extLst>
+        </p:cNvPr>
+        <p:cNvGrpSpPr/>
+        <p:nvPr/>
+      </p:nvGrpSpPr>
+      <p:grpSpPr>
+        <a:xfrm>
+          <a:off x="0" y="0"/>
+          <a:ext cx="0" cy="0"/>
+          <a:chOff x="0" y="0"/>
+          <a:chExt cx="0" cy="0"/>
+        </a:xfrm>
+      </p:grpSpPr>
+      <p:sp>
+        <p:nvSpPr>
+          <p:cNvPr id="5" name="內容版面配置區 4">
+            <a:extLst>
+              <a:ext uri="{FF2B5EF4-FFF2-40B4-BE49-F238E27FC236}">
+                <a16:creationId xmlns:a16="http://schemas.microsoft.com/office/drawing/2014/main" id="{CCB273CA-12CA-5220-9F9B-20D2F483069E}"/>
+              </a:ext>
+            </a:extLst>
+          </p:cNvPr>
+          <p:cNvSpPr>
+            <a:spLocks noGrp="1"/>
+          </p:cNvSpPr>
+          <p:nvPr>
+            <p:ph idx="1"/>
+          </p:nvPr>
+        </p:nvSpPr>
+        <p:spPr>
+          <a:xfrm>
+            <a:off x="0" y="1563639"/>
+            <a:ext cx="9144000" cy="1803647"/>
+          </a:xfrm>
+        </p:spPr>
+        <p:txBody>
+          <a:bodyPr anchor="ctr">
+            <a:normAutofit/>
+          </a:bodyPr>
+          <a:lstStyle/>
+          <a:p>
+            <a:pPr algn="ctr">
+              <a:buNone/>
+            </a:pPr>
+            <a:r>
+              <a:rPr lang="zh-TW" altLang="en-US" sz="4950" b="1" dirty="0">
+                <a:solidFill>
+                  <a:srgbClr val="660033"/>
+                </a:solidFill>
+                <a:latin typeface="微軟正黑體" pitchFamily="34" charset="-120"/>
+                <a:ea typeface="微軟正黑體" pitchFamily="34" charset="-120"/>
+              </a:rPr>
+              <a:t>讓我們起來傳揚</a:t>
+            </a:r>
+            <a:endParaRPr lang="en-US" altLang="zh-TW" sz="4950" b="1" dirty="0">
+              <a:solidFill>
+                <a:srgbClr val="660033"/>
+              </a:solidFill>
+              <a:latin typeface="微軟正黑體" pitchFamily="34" charset="-120"/>
+              <a:ea typeface="微軟正黑體" pitchFamily="34" charset="-120"/>
+            </a:endParaRPr>
+          </a:p>
+          <a:p>
+            <a:pPr algn="ctr">
+              <a:buNone/>
+            </a:pPr>
+            <a:r>
+              <a:rPr lang="zh-TW" altLang="en-US" sz="4950" b="1" dirty="0">
+                <a:solidFill>
+                  <a:srgbClr val="660033"/>
+                </a:solidFill>
+                <a:latin typeface="微軟正黑體" pitchFamily="34" charset="-120"/>
+                <a:ea typeface="微軟正黑體" pitchFamily="34" charset="-120"/>
+              </a:rPr>
+              <a:t>傳</a:t>
+            </a:r>
+            <a:r>
+              <a:rPr lang="zh-CN" altLang="en-US" sz="4950" b="1" dirty="0">
+                <a:solidFill>
+                  <a:srgbClr val="660033"/>
+                </a:solidFill>
+                <a:latin typeface="微軟正黑體" pitchFamily="34" charset="-120"/>
+                <a:ea typeface="微軟正黑體" pitchFamily="34" charset="-120"/>
+              </a:rPr>
+              <a:t>祢</a:t>
+            </a:r>
+            <a:r>
+              <a:rPr lang="zh-TW" altLang="en-US" sz="4950" b="1" dirty="0">
+                <a:solidFill>
+                  <a:srgbClr val="660033"/>
+                </a:solidFill>
+                <a:latin typeface="微軟正黑體" pitchFamily="34" charset="-120"/>
+                <a:ea typeface="微軟正黑體" pitchFamily="34" charset="-120"/>
+              </a:rPr>
+              <a:t>聖名到萬邦</a:t>
+            </a:r>
+            <a:endParaRPr lang="en-US" altLang="zh-TW" sz="4950" b="1" dirty="0">
+              <a:solidFill>
+                <a:srgbClr val="660033"/>
+              </a:solidFill>
+              <a:latin typeface="微軟正黑體" pitchFamily="34" charset="-120"/>
+              <a:ea typeface="微軟正黑體" pitchFamily="34" charset="-120"/>
+            </a:endParaRPr>
+          </a:p>
+        </p:txBody>
+      </p:sp>
+      <p:sp>
+        <p:nvSpPr>
+          <p:cNvPr id="3" name="TextBox 2">
+            <a:extLst>
+              <a:ext uri="{FF2B5EF4-FFF2-40B4-BE49-F238E27FC236}">
+                <a16:creationId xmlns:a16="http://schemas.microsoft.com/office/drawing/2014/main" id="{C2A428D8-7CDB-4E27-7FF5-ED496B7B4350}"/>
+              </a:ext>
+            </a:extLst>
+          </p:cNvPr>
+          <p:cNvSpPr txBox="1"/>
+          <p:nvPr/>
+        </p:nvSpPr>
+        <p:spPr>
+          <a:xfrm>
+            <a:off x="0" y="3867895"/>
+            <a:ext cx="9144000" cy="461665"/>
+          </a:xfrm>
+          <a:prstGeom prst="rect">
+            <a:avLst/>
+          </a:prstGeom>
+          <a:noFill/>
+        </p:spPr>
+        <p:txBody>
+          <a:bodyPr wrap="square" rtlCol="0">
+            <a:spAutoFit/>
+          </a:bodyPr>
+          <a:lstStyle/>
+          <a:p>
+            <a:pPr algn="ctr"/>
+            <a:r>
+              <a:rPr lang="en-US" sz="2400" b="1" dirty="0">
+                <a:solidFill>
+                  <a:srgbClr val="660033"/>
+                </a:solidFill>
+                <a:latin typeface="Microsoft JhengHei" panose="020B0604030504040204" pitchFamily="34" charset="-120"/>
+                <a:ea typeface="Microsoft JhengHei" panose="020B0604030504040204" pitchFamily="34" charset="-120"/>
+              </a:rPr>
+              <a:t>( </a:t>
+            </a:r>
+            <a:r>
+              <a:rPr lang="zh-CN" altLang="en-US" sz="2400" b="1" dirty="0">
+                <a:solidFill>
+                  <a:srgbClr val="660033"/>
+                </a:solidFill>
+                <a:latin typeface="Microsoft JhengHei" panose="020B0604030504040204" pitchFamily="34" charset="-120"/>
+                <a:ea typeface="Microsoft JhengHei" panose="020B0604030504040204" pitchFamily="34" charset="-120"/>
+              </a:rPr>
+              <a:t>副歌</a:t>
+            </a:r>
+            <a:r>
+              <a:rPr lang="en-US" sz="2400" b="1" dirty="0">
+                <a:solidFill>
+                  <a:srgbClr val="660033"/>
+                </a:solidFill>
+                <a:latin typeface="Microsoft JhengHei" panose="020B0604030504040204" pitchFamily="34" charset="-120"/>
+                <a:ea typeface="Microsoft JhengHei" panose="020B0604030504040204" pitchFamily="34" charset="-120"/>
+              </a:rPr>
+              <a:t> )</a:t>
+            </a:r>
+            <a:endParaRPr lang="vi-VN" sz="2400" b="1" dirty="0">
+              <a:solidFill>
+                <a:srgbClr val="660033"/>
+              </a:solidFill>
+              <a:ea typeface="Microsoft JhengHei" panose="020B0604030504040204" pitchFamily="34" charset="-120"/>
+            </a:endParaRPr>
+          </a:p>
+        </p:txBody>
+      </p:sp>
+    </p:spTree>
+    <p:extLst>
+      <p:ext uri="{BB962C8B-B14F-4D97-AF65-F5344CB8AC3E}">
+        <p14:creationId xmlns:p14="http://schemas.microsoft.com/office/powerpoint/2010/main" val="275328514"/>
+      </p:ext>
+    </p:extLst>
+  </p:cSld>
+  <p:clrMapOvr>
+    <a:masterClrMapping/>
+  </p:clrMapOvr>
+</p:sld>
+</file>
+
+<file path=ppt/slides/slide9.xml><?xml version="1.0" encoding="utf-8"?>
+<p:sld xmlns:a="http://schemas.openxmlformats.org/drawingml/2006/main" xmlns:r="http://schemas.openxmlformats.org/officeDocument/2006/relationships" xmlns:p="http://schemas.openxmlformats.org/presentationml/2006/main">
+  <p:cSld>
+    <p:spTree>
+      <p:nvGrpSpPr>
+        <p:cNvPr id="1" name="">
+          <a:extLst>
+            <a:ext uri="{FF2B5EF4-FFF2-40B4-BE49-F238E27FC236}">
+              <a16:creationId xmlns:a16="http://schemas.microsoft.com/office/drawing/2014/main" id="{BF3CA5C2-0C07-FBBE-8113-DF90DE1C243F}"/>
+            </a:ext>
+          </a:extLst>
+        </p:cNvPr>
+        <p:cNvGrpSpPr/>
+        <p:nvPr/>
+      </p:nvGrpSpPr>
+      <p:grpSpPr>
+        <a:xfrm>
+          <a:off x="0" y="0"/>
+          <a:ext cx="0" cy="0"/>
+          <a:chOff x="0" y="0"/>
+          <a:chExt cx="0" cy="0"/>
+        </a:xfrm>
+      </p:grpSpPr>
+      <p:sp>
+        <p:nvSpPr>
+          <p:cNvPr id="5" name="內容版面配置區 4">
+            <a:extLst>
+              <a:ext uri="{FF2B5EF4-FFF2-40B4-BE49-F238E27FC236}">
+                <a16:creationId xmlns:a16="http://schemas.microsoft.com/office/drawing/2014/main" id="{D3DE5305-6CB0-296C-1F6F-1CA29652419E}"/>
+              </a:ext>
+            </a:extLst>
+          </p:cNvPr>
+          <p:cNvSpPr>
+            <a:spLocks noGrp="1"/>
+          </p:cNvSpPr>
+          <p:nvPr>
+            <p:ph idx="1"/>
+          </p:nvPr>
+        </p:nvSpPr>
+        <p:spPr>
+          <a:xfrm>
+            <a:off x="0" y="1563639"/>
+            <a:ext cx="9144000" cy="1803647"/>
+          </a:xfrm>
+        </p:spPr>
+        <p:txBody>
+          <a:bodyPr anchor="ctr">
+            <a:normAutofit/>
+          </a:bodyPr>
+          <a:lstStyle/>
+          <a:p>
+            <a:pPr algn="ctr">
+              <a:buNone/>
+            </a:pPr>
+            <a:r>
+              <a:rPr lang="zh-TW" altLang="en-US" sz="4950" b="1" dirty="0">
+                <a:solidFill>
+                  <a:srgbClr val="660033"/>
+                </a:solidFill>
+                <a:latin typeface="微軟正黑體" pitchFamily="34" charset="-120"/>
+                <a:ea typeface="微軟正黑體" pitchFamily="34" charset="-120"/>
+              </a:rPr>
+              <a:t>讓世界得知</a:t>
+            </a:r>
+            <a:r>
+              <a:rPr lang="zh-CN" altLang="en-US" sz="4950" b="1" dirty="0">
+                <a:solidFill>
+                  <a:srgbClr val="660033"/>
+                </a:solidFill>
+                <a:latin typeface="微軟正黑體" pitchFamily="34" charset="-120"/>
+                <a:ea typeface="微軟正黑體" pitchFamily="34" charset="-120"/>
+              </a:rPr>
+              <a:t>祢</a:t>
+            </a:r>
+            <a:r>
+              <a:rPr lang="zh-TW" altLang="en-US" sz="4950" b="1" dirty="0">
+                <a:solidFill>
+                  <a:srgbClr val="660033"/>
+                </a:solidFill>
+                <a:latin typeface="微軟正黑體" pitchFamily="34" charset="-120"/>
+                <a:ea typeface="微軟正黑體" pitchFamily="34" charset="-120"/>
+              </a:rPr>
+              <a:t>的道路</a:t>
+            </a:r>
+            <a:endParaRPr lang="en-US" altLang="zh-TW" sz="4950" b="1" dirty="0">
+              <a:solidFill>
+                <a:srgbClr val="660033"/>
+              </a:solidFill>
+              <a:latin typeface="微軟正黑體" pitchFamily="34" charset="-120"/>
+              <a:ea typeface="微軟正黑體" pitchFamily="34" charset="-120"/>
+            </a:endParaRPr>
+          </a:p>
+          <a:p>
+            <a:pPr algn="ctr">
+              <a:buNone/>
+            </a:pPr>
+            <a:r>
+              <a:rPr lang="zh-TW" altLang="en-US" sz="4950" b="1" dirty="0">
+                <a:solidFill>
+                  <a:srgbClr val="660033"/>
+                </a:solidFill>
+                <a:latin typeface="微軟正黑體" pitchFamily="34" charset="-120"/>
+                <a:ea typeface="微軟正黑體" pitchFamily="34" charset="-120"/>
+              </a:rPr>
+              <a:t>讓主</a:t>
+            </a:r>
+            <a:r>
+              <a:rPr lang="zh-CN" altLang="en-US" sz="4950" b="1" dirty="0">
+                <a:solidFill>
+                  <a:srgbClr val="660033"/>
+                </a:solidFill>
+                <a:latin typeface="微軟正黑體" pitchFamily="34" charset="-120"/>
+                <a:ea typeface="微軟正黑體" pitchFamily="34" charset="-120"/>
+              </a:rPr>
+              <a:t>祢</a:t>
+            </a:r>
+            <a:r>
+              <a:rPr lang="zh-TW" altLang="en-US" sz="4950" b="1" dirty="0">
+                <a:solidFill>
+                  <a:srgbClr val="660033"/>
+                </a:solidFill>
+                <a:latin typeface="微軟正黑體" pitchFamily="34" charset="-120"/>
+                <a:ea typeface="微軟正黑體" pitchFamily="34" charset="-120"/>
+              </a:rPr>
+              <a:t>榮耀照亮四方﻿</a:t>
+            </a:r>
+          </a:p>
+        </p:txBody>
+      </p:sp>
+      <p:sp>
+        <p:nvSpPr>
+          <p:cNvPr id="3" name="TextBox 2">
+            <a:extLst>
+              <a:ext uri="{FF2B5EF4-FFF2-40B4-BE49-F238E27FC236}">
+                <a16:creationId xmlns:a16="http://schemas.microsoft.com/office/drawing/2014/main" id="{922FBD6E-C876-DD63-202D-B5D23DF8E0EF}"/>
+              </a:ext>
+            </a:extLst>
+          </p:cNvPr>
+          <p:cNvSpPr txBox="1"/>
+          <p:nvPr/>
+        </p:nvSpPr>
+        <p:spPr>
+          <a:xfrm>
+            <a:off x="0" y="3867895"/>
+            <a:ext cx="9144000" cy="461665"/>
+          </a:xfrm>
+          <a:prstGeom prst="rect">
+            <a:avLst/>
+          </a:prstGeom>
+          <a:noFill/>
+        </p:spPr>
+        <p:txBody>
+          <a:bodyPr wrap="square" rtlCol="0">
+            <a:spAutoFit/>
+          </a:bodyPr>
+          <a:lstStyle/>
+          <a:p>
+            <a:pPr algn="ctr"/>
+            <a:r>
+              <a:rPr lang="en-US" sz="2400" b="1" dirty="0">
+                <a:solidFill>
+                  <a:srgbClr val="660033"/>
+                </a:solidFill>
+                <a:latin typeface="Microsoft JhengHei" panose="020B0604030504040204" pitchFamily="34" charset="-120"/>
+                <a:ea typeface="Microsoft JhengHei" panose="020B0604030504040204" pitchFamily="34" charset="-120"/>
+              </a:rPr>
+              <a:t>( </a:t>
+            </a:r>
+            <a:r>
+              <a:rPr lang="zh-CN" altLang="en-US" sz="2400" b="1" dirty="0">
+                <a:solidFill>
+                  <a:srgbClr val="660033"/>
+                </a:solidFill>
+                <a:latin typeface="Microsoft JhengHei" panose="020B0604030504040204" pitchFamily="34" charset="-120"/>
+                <a:ea typeface="Microsoft JhengHei" panose="020B0604030504040204" pitchFamily="34" charset="-120"/>
+              </a:rPr>
+              <a:t>副歌</a:t>
+            </a:r>
+            <a:r>
+              <a:rPr lang="en-US" sz="2400" b="1" dirty="0">
+                <a:solidFill>
+                  <a:srgbClr val="660033"/>
+                </a:solidFill>
+                <a:latin typeface="Microsoft JhengHei" panose="020B0604030504040204" pitchFamily="34" charset="-120"/>
+                <a:ea typeface="Microsoft JhengHei" panose="020B0604030504040204" pitchFamily="34" charset="-120"/>
+              </a:rPr>
+              <a:t> )</a:t>
+            </a:r>
+            <a:endParaRPr lang="vi-VN" sz="2400" b="1" dirty="0">
+              <a:solidFill>
+                <a:srgbClr val="660033"/>
+              </a:solidFill>
+              <a:ea typeface="Microsoft JhengHei" panose="020B0604030504040204" pitchFamily="34" charset="-120"/>
+            </a:endParaRPr>
+          </a:p>
+        </p:txBody>
+      </p:sp>
+    </p:spTree>
+    <p:extLst>
+      <p:ext uri="{BB962C8B-B14F-4D97-AF65-F5344CB8AC3E}">
+        <p14:creationId xmlns:p14="http://schemas.microsoft.com/office/powerpoint/2010/main" val="56694362"/>
+      </p:ext>
+    </p:extLst>
   </p:cSld>
   <p:clrMapOvr>
     <a:masterClrMapping/>
